--- a/RST_app update.pptx
+++ b/RST_app update.pptx
@@ -5,7 +5,7 @@
     <p:sldMasterId id="2147483648" r:id="rId1"/>
   </p:sldMasterIdLst>
   <p:notesMasterIdLst>
-    <p:notesMasterId r:id="rId8"/>
+    <p:notesMasterId r:id="rId13"/>
   </p:notesMasterIdLst>
   <p:sldIdLst>
     <p:sldId id="276" r:id="rId2"/>
@@ -14,6 +14,11 @@
     <p:sldId id="297" r:id="rId5"/>
     <p:sldId id="298" r:id="rId6"/>
     <p:sldId id="294" r:id="rId7"/>
+    <p:sldId id="301" r:id="rId8"/>
+    <p:sldId id="302" r:id="rId9"/>
+    <p:sldId id="303" r:id="rId10"/>
+    <p:sldId id="304" r:id="rId11"/>
+    <p:sldId id="305" r:id="rId12"/>
   </p:sldIdLst>
   <p:sldSz cx="12192000" cy="6858000"/>
   <p:notesSz cx="6858000" cy="9144000"/>
@@ -112,19 +117,307 @@
       </a:defRPr>
     </a:lvl9pPr>
   </p:defaultTextStyle>
+  <p:extLst>
+    <p:ext uri="{EFAFB233-063F-42B5-8137-9DF3F51BA10A}">
+      <p15:sldGuideLst xmlns:p15="http://schemas.microsoft.com/office/powerpoint/2012/main"/>
+    </p:ext>
+  </p:extLst>
 </p:presentation>
 </file>
 
 <file path=ppt/revisionInfo.xml><?xml version="1.0" encoding="utf-8"?>
 <p1510:revInfo xmlns:a="http://schemas.openxmlformats.org/drawingml/2006/main" xmlns:r="http://schemas.openxmlformats.org/officeDocument/2006/relationships" xmlns:p1510="http://schemas.microsoft.com/office/powerpoint/2015/10/main">
   <p1510:revLst>
-    <p1510:client id="{0EFA6DB5-28CD-4848-A99A-6ED94B7AEA2C}" v="15" dt="2026-05-04T19:55:10.581"/>
+    <p1510:client id="{72A1A1A6-BCAB-46A2-819A-3B3433F6FD1F}" v="4" dt="2026-06-15T17:15:30.791"/>
   </p1510:revLst>
 </p1510:revInfo>
 </file>
 
 <file path=ppt/changesInfos/changesInfo1.xml><?xml version="1.0" encoding="utf-8"?>
 <pc:chgInfo xmlns:a="http://schemas.openxmlformats.org/drawingml/2006/main" xmlns:r="http://schemas.openxmlformats.org/officeDocument/2006/relationships" xmlns:ac="http://schemas.microsoft.com/office/drawing/2013/main/command" xmlns:pc="http://schemas.microsoft.com/office/powerpoint/2013/main/command">
+  <pc:docChgLst>
+    <pc:chgData name="Barros, Arthur@Wildlife" userId="13f56b0b-3529-4413-b3c2-bd9e153a9954" providerId="ADAL" clId="{72A1A1A6-BCAB-46A2-819A-3B3433F6FD1F}"/>
+    <pc:docChg chg="custSel addSld modSld">
+      <pc:chgData name="Barros, Arthur@Wildlife" userId="13f56b0b-3529-4413-b3c2-bd9e153a9954" providerId="ADAL" clId="{72A1A1A6-BCAB-46A2-819A-3B3433F6FD1F}" dt="2026-06-16T16:57:16.782" v="82" actId="208"/>
+      <pc:docMkLst>
+        <pc:docMk/>
+      </pc:docMkLst>
+      <pc:sldChg chg="addSp modSp mod">
+        <pc:chgData name="Barros, Arthur@Wildlife" userId="13f56b0b-3529-4413-b3c2-bd9e153a9954" providerId="ADAL" clId="{72A1A1A6-BCAB-46A2-819A-3B3433F6FD1F}" dt="2026-06-15T17:15:30.791" v="57" actId="164"/>
+        <pc:sldMkLst>
+          <pc:docMk/>
+          <pc:sldMk cId="291410532" sldId="276"/>
+        </pc:sldMkLst>
+        <pc:spChg chg="mod">
+          <ac:chgData name="Barros, Arthur@Wildlife" userId="13f56b0b-3529-4413-b3c2-bd9e153a9954" providerId="ADAL" clId="{72A1A1A6-BCAB-46A2-819A-3B3433F6FD1F}" dt="2026-06-15T17:13:45.808" v="25" actId="113"/>
+          <ac:spMkLst>
+            <pc:docMk/>
+            <pc:sldMk cId="291410532" sldId="276"/>
+            <ac:spMk id="9" creationId="{28F64EF9-07A5-7B0F-7CB8-AE4ABE98B892}"/>
+          </ac:spMkLst>
+        </pc:spChg>
+        <pc:spChg chg="add mod ord">
+          <ac:chgData name="Barros, Arthur@Wildlife" userId="13f56b0b-3529-4413-b3c2-bd9e153a9954" providerId="ADAL" clId="{72A1A1A6-BCAB-46A2-819A-3B3433F6FD1F}" dt="2026-06-15T17:15:30.791" v="57" actId="164"/>
+          <ac:spMkLst>
+            <pc:docMk/>
+            <pc:sldMk cId="291410532" sldId="276"/>
+            <ac:spMk id="10" creationId="{E5AFB95E-8465-5D25-CC2C-95DF00038DD7}"/>
+          </ac:spMkLst>
+        </pc:spChg>
+        <pc:spChg chg="mod">
+          <ac:chgData name="Barros, Arthur@Wildlife" userId="13f56b0b-3529-4413-b3c2-bd9e153a9954" providerId="ADAL" clId="{72A1A1A6-BCAB-46A2-819A-3B3433F6FD1F}" dt="2026-06-15T17:13:05.194" v="0" actId="164"/>
+          <ac:spMkLst>
+            <pc:docMk/>
+            <pc:sldMk cId="291410532" sldId="276"/>
+            <ac:spMk id="12" creationId="{FCD32D64-CD6D-F599-9041-7FDB1E87E952}"/>
+          </ac:spMkLst>
+        </pc:spChg>
+        <pc:spChg chg="mod">
+          <ac:chgData name="Barros, Arthur@Wildlife" userId="13f56b0b-3529-4413-b3c2-bd9e153a9954" providerId="ADAL" clId="{72A1A1A6-BCAB-46A2-819A-3B3433F6FD1F}" dt="2026-06-15T17:13:05.194" v="0" actId="164"/>
+          <ac:spMkLst>
+            <pc:docMk/>
+            <pc:sldMk cId="291410532" sldId="276"/>
+            <ac:spMk id="13" creationId="{1DD3D82D-363B-050B-0FD5-607FF739383A}"/>
+          </ac:spMkLst>
+        </pc:spChg>
+        <pc:spChg chg="mod">
+          <ac:chgData name="Barros, Arthur@Wildlife" userId="13f56b0b-3529-4413-b3c2-bd9e153a9954" providerId="ADAL" clId="{72A1A1A6-BCAB-46A2-819A-3B3433F6FD1F}" dt="2026-06-15T17:13:05.194" v="0" actId="164"/>
+          <ac:spMkLst>
+            <pc:docMk/>
+            <pc:sldMk cId="291410532" sldId="276"/>
+            <ac:spMk id="15" creationId="{154CC95C-BB11-AE31-622B-74A6623D944A}"/>
+          </ac:spMkLst>
+        </pc:spChg>
+        <pc:spChg chg="mod">
+          <ac:chgData name="Barros, Arthur@Wildlife" userId="13f56b0b-3529-4413-b3c2-bd9e153a9954" providerId="ADAL" clId="{72A1A1A6-BCAB-46A2-819A-3B3433F6FD1F}" dt="2026-06-15T17:13:05.194" v="0" actId="164"/>
+          <ac:spMkLst>
+            <pc:docMk/>
+            <pc:sldMk cId="291410532" sldId="276"/>
+            <ac:spMk id="24" creationId="{38A56400-E96D-A5B7-9A2F-CB0347AD6A34}"/>
+          </ac:spMkLst>
+        </pc:spChg>
+        <pc:spChg chg="mod">
+          <ac:chgData name="Barros, Arthur@Wildlife" userId="13f56b0b-3529-4413-b3c2-bd9e153a9954" providerId="ADAL" clId="{72A1A1A6-BCAB-46A2-819A-3B3433F6FD1F}" dt="2026-06-15T17:13:54.361" v="39" actId="115"/>
+          <ac:spMkLst>
+            <pc:docMk/>
+            <pc:sldMk cId="291410532" sldId="276"/>
+            <ac:spMk id="30" creationId="{DEEA24D1-B2C4-ECEF-247D-D1E3C3B0FD1D}"/>
+          </ac:spMkLst>
+        </pc:spChg>
+        <pc:spChg chg="mod">
+          <ac:chgData name="Barros, Arthur@Wildlife" userId="13f56b0b-3529-4413-b3c2-bd9e153a9954" providerId="ADAL" clId="{72A1A1A6-BCAB-46A2-819A-3B3433F6FD1F}" dt="2026-06-15T17:13:05.194" v="0" actId="164"/>
+          <ac:spMkLst>
+            <pc:docMk/>
+            <pc:sldMk cId="291410532" sldId="276"/>
+            <ac:spMk id="1076" creationId="{DBDDDEFA-88A7-BD8F-F61C-85F7784D0B8C}"/>
+          </ac:spMkLst>
+        </pc:spChg>
+        <pc:spChg chg="mod">
+          <ac:chgData name="Barros, Arthur@Wildlife" userId="13f56b0b-3529-4413-b3c2-bd9e153a9954" providerId="ADAL" clId="{72A1A1A6-BCAB-46A2-819A-3B3433F6FD1F}" dt="2026-06-15T17:13:05.194" v="0" actId="164"/>
+          <ac:spMkLst>
+            <pc:docMk/>
+            <pc:sldMk cId="291410532" sldId="276"/>
+            <ac:spMk id="1084" creationId="{D01BED6D-0FC1-7191-B4BE-C9524901E489}"/>
+          </ac:spMkLst>
+        </pc:spChg>
+        <pc:spChg chg="mod">
+          <ac:chgData name="Barros, Arthur@Wildlife" userId="13f56b0b-3529-4413-b3c2-bd9e153a9954" providerId="ADAL" clId="{72A1A1A6-BCAB-46A2-819A-3B3433F6FD1F}" dt="2026-06-15T17:13:05.194" v="0" actId="164"/>
+          <ac:spMkLst>
+            <pc:docMk/>
+            <pc:sldMk cId="291410532" sldId="276"/>
+            <ac:spMk id="1097" creationId="{12CB0752-F8A1-C486-F0E8-AC51EAC4E91C}"/>
+          </ac:spMkLst>
+        </pc:spChg>
+        <pc:spChg chg="mod">
+          <ac:chgData name="Barros, Arthur@Wildlife" userId="13f56b0b-3529-4413-b3c2-bd9e153a9954" providerId="ADAL" clId="{72A1A1A6-BCAB-46A2-819A-3B3433F6FD1F}" dt="2026-06-15T17:14:06.044" v="50" actId="113"/>
+          <ac:spMkLst>
+            <pc:docMk/>
+            <pc:sldMk cId="291410532" sldId="276"/>
+            <ac:spMk id="1103" creationId="{53AC842C-A473-DCE0-3329-23F7D98717D1}"/>
+          </ac:spMkLst>
+        </pc:spChg>
+        <pc:grpChg chg="mod">
+          <ac:chgData name="Barros, Arthur@Wildlife" userId="13f56b0b-3529-4413-b3c2-bd9e153a9954" providerId="ADAL" clId="{72A1A1A6-BCAB-46A2-819A-3B3433F6FD1F}" dt="2026-06-15T17:15:30.791" v="57" actId="164"/>
+          <ac:grpSpMkLst>
+            <pc:docMk/>
+            <pc:sldMk cId="291410532" sldId="276"/>
+            <ac:grpSpMk id="2" creationId="{21056180-46C7-2AAB-739D-5D96A64551A3}"/>
+          </ac:grpSpMkLst>
+        </pc:grpChg>
+        <pc:grpChg chg="add mod">
+          <ac:chgData name="Barros, Arthur@Wildlife" userId="13f56b0b-3529-4413-b3c2-bd9e153a9954" providerId="ADAL" clId="{72A1A1A6-BCAB-46A2-819A-3B3433F6FD1F}" dt="2026-06-15T17:15:30.791" v="57" actId="164"/>
+          <ac:grpSpMkLst>
+            <pc:docMk/>
+            <pc:sldMk cId="291410532" sldId="276"/>
+            <ac:grpSpMk id="14" creationId="{71BFAF28-9674-31F2-A503-1B2C6BFA9EB8}"/>
+          </ac:grpSpMkLst>
+        </pc:grpChg>
+      </pc:sldChg>
+      <pc:sldChg chg="addSp delSp modSp new mod">
+        <pc:chgData name="Barros, Arthur@Wildlife" userId="13f56b0b-3529-4413-b3c2-bd9e153a9954" providerId="ADAL" clId="{72A1A1A6-BCAB-46A2-819A-3B3433F6FD1F}" dt="2026-06-16T15:44:31.420" v="61" actId="208"/>
+        <pc:sldMkLst>
+          <pc:docMk/>
+          <pc:sldMk cId="3979468374" sldId="301"/>
+        </pc:sldMkLst>
+        <pc:spChg chg="del">
+          <ac:chgData name="Barros, Arthur@Wildlife" userId="13f56b0b-3529-4413-b3c2-bd9e153a9954" providerId="ADAL" clId="{72A1A1A6-BCAB-46A2-819A-3B3433F6FD1F}" dt="2026-06-16T15:43:38.475" v="59" actId="478"/>
+          <ac:spMkLst>
+            <pc:docMk/>
+            <pc:sldMk cId="3979468374" sldId="301"/>
+            <ac:spMk id="2" creationId="{7BF2B8B1-B57D-3C7E-1AC9-177CA699A7EF}"/>
+          </ac:spMkLst>
+        </pc:spChg>
+        <pc:spChg chg="del">
+          <ac:chgData name="Barros, Arthur@Wildlife" userId="13f56b0b-3529-4413-b3c2-bd9e153a9954" providerId="ADAL" clId="{72A1A1A6-BCAB-46A2-819A-3B3433F6FD1F}" dt="2026-06-16T15:43:38.475" v="59" actId="478"/>
+          <ac:spMkLst>
+            <pc:docMk/>
+            <pc:sldMk cId="3979468374" sldId="301"/>
+            <ac:spMk id="3" creationId="{F5452946-CB6A-D896-F3A6-0BE8A13FEB0F}"/>
+          </ac:spMkLst>
+        </pc:spChg>
+        <pc:picChg chg="add mod">
+          <ac:chgData name="Barros, Arthur@Wildlife" userId="13f56b0b-3529-4413-b3c2-bd9e153a9954" providerId="ADAL" clId="{72A1A1A6-BCAB-46A2-819A-3B3433F6FD1F}" dt="2026-06-16T15:44:31.420" v="61" actId="208"/>
+          <ac:picMkLst>
+            <pc:docMk/>
+            <pc:sldMk cId="3979468374" sldId="301"/>
+            <ac:picMk id="5" creationId="{F42DD508-E0FE-2229-3B76-765AA59A967D}"/>
+          </ac:picMkLst>
+        </pc:picChg>
+      </pc:sldChg>
+      <pc:sldChg chg="addSp delSp modSp new mod">
+        <pc:chgData name="Barros, Arthur@Wildlife" userId="13f56b0b-3529-4413-b3c2-bd9e153a9954" providerId="ADAL" clId="{72A1A1A6-BCAB-46A2-819A-3B3433F6FD1F}" dt="2026-06-16T16:49:56.390" v="77" actId="208"/>
+        <pc:sldMkLst>
+          <pc:docMk/>
+          <pc:sldMk cId="1781711548" sldId="302"/>
+        </pc:sldMkLst>
+        <pc:spChg chg="del">
+          <ac:chgData name="Barros, Arthur@Wildlife" userId="13f56b0b-3529-4413-b3c2-bd9e153a9954" providerId="ADAL" clId="{72A1A1A6-BCAB-46A2-819A-3B3433F6FD1F}" dt="2026-06-16T15:51:17.878" v="63" actId="478"/>
+          <ac:spMkLst>
+            <pc:docMk/>
+            <pc:sldMk cId="1781711548" sldId="302"/>
+            <ac:spMk id="2" creationId="{5C689851-C266-9576-453E-BA1D54E1F3EA}"/>
+          </ac:spMkLst>
+        </pc:spChg>
+        <pc:spChg chg="del">
+          <ac:chgData name="Barros, Arthur@Wildlife" userId="13f56b0b-3529-4413-b3c2-bd9e153a9954" providerId="ADAL" clId="{72A1A1A6-BCAB-46A2-819A-3B3433F6FD1F}" dt="2026-06-16T15:51:17.878" v="63" actId="478"/>
+          <ac:spMkLst>
+            <pc:docMk/>
+            <pc:sldMk cId="1781711548" sldId="302"/>
+            <ac:spMk id="3" creationId="{FD1B43BA-639B-50B8-76AD-ECF353DEAD5E}"/>
+          </ac:spMkLst>
+        </pc:spChg>
+        <pc:picChg chg="add del mod">
+          <ac:chgData name="Barros, Arthur@Wildlife" userId="13f56b0b-3529-4413-b3c2-bd9e153a9954" providerId="ADAL" clId="{72A1A1A6-BCAB-46A2-819A-3B3433F6FD1F}" dt="2026-06-16T16:13:36.174" v="66" actId="478"/>
+          <ac:picMkLst>
+            <pc:docMk/>
+            <pc:sldMk cId="1781711548" sldId="302"/>
+            <ac:picMk id="5" creationId="{373C07DF-1C6F-F1BE-F688-C1B8DCB8A297}"/>
+          </ac:picMkLst>
+        </pc:picChg>
+        <pc:picChg chg="add mod">
+          <ac:chgData name="Barros, Arthur@Wildlife" userId="13f56b0b-3529-4413-b3c2-bd9e153a9954" providerId="ADAL" clId="{72A1A1A6-BCAB-46A2-819A-3B3433F6FD1F}" dt="2026-06-16T16:49:56.390" v="77" actId="208"/>
+          <ac:picMkLst>
+            <pc:docMk/>
+            <pc:sldMk cId="1781711548" sldId="302"/>
+            <ac:picMk id="7" creationId="{878B66BB-CC08-4187-0732-155D1414B52A}"/>
+          </ac:picMkLst>
+        </pc:picChg>
+      </pc:sldChg>
+      <pc:sldChg chg="addSp delSp modSp new mod">
+        <pc:chgData name="Barros, Arthur@Wildlife" userId="13f56b0b-3529-4413-b3c2-bd9e153a9954" providerId="ADAL" clId="{72A1A1A6-BCAB-46A2-819A-3B3433F6FD1F}" dt="2026-06-16T16:52:49.665" v="80" actId="208"/>
+        <pc:sldMkLst>
+          <pc:docMk/>
+          <pc:sldMk cId="2821681883" sldId="303"/>
+        </pc:sldMkLst>
+        <pc:spChg chg="del">
+          <ac:chgData name="Barros, Arthur@Wildlife" userId="13f56b0b-3529-4413-b3c2-bd9e153a9954" providerId="ADAL" clId="{72A1A1A6-BCAB-46A2-819A-3B3433F6FD1F}" dt="2026-06-16T16:13:45.098" v="69" actId="478"/>
+          <ac:spMkLst>
+            <pc:docMk/>
+            <pc:sldMk cId="2821681883" sldId="303"/>
+            <ac:spMk id="2" creationId="{F294D74E-593F-1C6F-C2D4-1CA96F329203}"/>
+          </ac:spMkLst>
+        </pc:spChg>
+        <pc:spChg chg="del">
+          <ac:chgData name="Barros, Arthur@Wildlife" userId="13f56b0b-3529-4413-b3c2-bd9e153a9954" providerId="ADAL" clId="{72A1A1A6-BCAB-46A2-819A-3B3433F6FD1F}" dt="2026-06-16T16:13:45.098" v="69" actId="478"/>
+          <ac:spMkLst>
+            <pc:docMk/>
+            <pc:sldMk cId="2821681883" sldId="303"/>
+            <ac:spMk id="3" creationId="{E7D13F30-E0A9-41C0-47FF-2E0BBE9D7A3E}"/>
+          </ac:spMkLst>
+        </pc:spChg>
+        <pc:picChg chg="add mod modCrop">
+          <ac:chgData name="Barros, Arthur@Wildlife" userId="13f56b0b-3529-4413-b3c2-bd9e153a9954" providerId="ADAL" clId="{72A1A1A6-BCAB-46A2-819A-3B3433F6FD1F}" dt="2026-06-16T16:52:49.665" v="80" actId="208"/>
+          <ac:picMkLst>
+            <pc:docMk/>
+            <pc:sldMk cId="2821681883" sldId="303"/>
+            <ac:picMk id="5" creationId="{65253A6E-26E1-B028-21D7-9A5492F0B755}"/>
+          </ac:picMkLst>
+        </pc:picChg>
+      </pc:sldChg>
+      <pc:sldChg chg="addSp delSp modSp new mod">
+        <pc:chgData name="Barros, Arthur@Wildlife" userId="13f56b0b-3529-4413-b3c2-bd9e153a9954" providerId="ADAL" clId="{72A1A1A6-BCAB-46A2-819A-3B3433F6FD1F}" dt="2026-06-16T16:55:36.366" v="81" actId="208"/>
+        <pc:sldMkLst>
+          <pc:docMk/>
+          <pc:sldMk cId="3165026171" sldId="304"/>
+        </pc:sldMkLst>
+        <pc:spChg chg="del">
+          <ac:chgData name="Barros, Arthur@Wildlife" userId="13f56b0b-3529-4413-b3c2-bd9e153a9954" providerId="ADAL" clId="{72A1A1A6-BCAB-46A2-819A-3B3433F6FD1F}" dt="2026-06-16T16:14:07.879" v="72" actId="478"/>
+          <ac:spMkLst>
+            <pc:docMk/>
+            <pc:sldMk cId="3165026171" sldId="304"/>
+            <ac:spMk id="2" creationId="{A2E2DE5F-CA7D-7880-10DF-9FA2D95A88A2}"/>
+          </ac:spMkLst>
+        </pc:spChg>
+        <pc:spChg chg="del">
+          <ac:chgData name="Barros, Arthur@Wildlife" userId="13f56b0b-3529-4413-b3c2-bd9e153a9954" providerId="ADAL" clId="{72A1A1A6-BCAB-46A2-819A-3B3433F6FD1F}" dt="2026-06-16T16:14:07.879" v="72" actId="478"/>
+          <ac:spMkLst>
+            <pc:docMk/>
+            <pc:sldMk cId="3165026171" sldId="304"/>
+            <ac:spMk id="3" creationId="{EE7AFA80-560B-68C6-536A-792968642CA2}"/>
+          </ac:spMkLst>
+        </pc:spChg>
+        <pc:picChg chg="add mod">
+          <ac:chgData name="Barros, Arthur@Wildlife" userId="13f56b0b-3529-4413-b3c2-bd9e153a9954" providerId="ADAL" clId="{72A1A1A6-BCAB-46A2-819A-3B3433F6FD1F}" dt="2026-06-16T16:55:36.366" v="81" actId="208"/>
+          <ac:picMkLst>
+            <pc:docMk/>
+            <pc:sldMk cId="3165026171" sldId="304"/>
+            <ac:picMk id="5" creationId="{DD32BB87-ED6F-97FE-9260-537785B4256A}"/>
+          </ac:picMkLst>
+        </pc:picChg>
+      </pc:sldChg>
+      <pc:sldChg chg="addSp delSp modSp new mod">
+        <pc:chgData name="Barros, Arthur@Wildlife" userId="13f56b0b-3529-4413-b3c2-bd9e153a9954" providerId="ADAL" clId="{72A1A1A6-BCAB-46A2-819A-3B3433F6FD1F}" dt="2026-06-16T16:57:16.782" v="82" actId="208"/>
+        <pc:sldMkLst>
+          <pc:docMk/>
+          <pc:sldMk cId="3349216178" sldId="305"/>
+        </pc:sldMkLst>
+        <pc:spChg chg="del">
+          <ac:chgData name="Barros, Arthur@Wildlife" userId="13f56b0b-3529-4413-b3c2-bd9e153a9954" providerId="ADAL" clId="{72A1A1A6-BCAB-46A2-819A-3B3433F6FD1F}" dt="2026-06-16T16:14:24.446" v="75" actId="478"/>
+          <ac:spMkLst>
+            <pc:docMk/>
+            <pc:sldMk cId="3349216178" sldId="305"/>
+            <ac:spMk id="2" creationId="{DB4AD286-6857-7BC4-1DE1-FC94B9BF99D2}"/>
+          </ac:spMkLst>
+        </pc:spChg>
+        <pc:spChg chg="del">
+          <ac:chgData name="Barros, Arthur@Wildlife" userId="13f56b0b-3529-4413-b3c2-bd9e153a9954" providerId="ADAL" clId="{72A1A1A6-BCAB-46A2-819A-3B3433F6FD1F}" dt="2026-06-16T16:14:24.446" v="75" actId="478"/>
+          <ac:spMkLst>
+            <pc:docMk/>
+            <pc:sldMk cId="3349216178" sldId="305"/>
+            <ac:spMk id="3" creationId="{C39475C4-00FB-E5BA-0B77-AA45258762E5}"/>
+          </ac:spMkLst>
+        </pc:spChg>
+        <pc:picChg chg="add mod">
+          <ac:chgData name="Barros, Arthur@Wildlife" userId="13f56b0b-3529-4413-b3c2-bd9e153a9954" providerId="ADAL" clId="{72A1A1A6-BCAB-46A2-819A-3B3433F6FD1F}" dt="2026-06-16T16:57:16.782" v="82" actId="208"/>
+          <ac:picMkLst>
+            <pc:docMk/>
+            <pc:sldMk cId="3349216178" sldId="305"/>
+            <ac:picMk id="5" creationId="{0B086466-996E-6A9A-75F1-80EA195267CC}"/>
+          </ac:picMkLst>
+        </pc:picChg>
+      </pc:sldChg>
+    </pc:docChg>
+  </pc:docChgLst>
   <pc:docChgLst>
     <pc:chgData name="Barros, Arthur@Wildlife" userId="13f56b0b-3529-4413-b3c2-bd9e153a9954" providerId="ADAL" clId="{83F66843-D3E2-4209-914A-087BF0EB956C}"/>
     <pc:docChg chg="custSel addSld delSld modSld sldOrd">
@@ -348,7 +641,7 @@
           <a:p>
             <a:fld id="{C03C6445-ED23-43CE-B5A1-91550B471FA6}" type="datetimeFigureOut">
               <a:rPr lang="en-US" smtClean="0"/>
-              <a:t>5/4/2026</a:t>
+              <a:t>6/15/2026</a:t>
             </a:fld>
             <a:endParaRPr lang="en-US"/>
           </a:p>
@@ -870,7 +1163,7 @@
           <a:p>
             <a:fld id="{505F9A76-AE69-4078-B0A8-C46378DD53B3}" type="datetimeFigureOut">
               <a:rPr lang="en-US" smtClean="0"/>
-              <a:t>5/4/2026</a:t>
+              <a:t>6/15/2026</a:t>
             </a:fld>
             <a:endParaRPr lang="en-US"/>
           </a:p>
@@ -1068,7 +1361,7 @@
           <a:p>
             <a:fld id="{505F9A76-AE69-4078-B0A8-C46378DD53B3}" type="datetimeFigureOut">
               <a:rPr lang="en-US" smtClean="0"/>
-              <a:t>5/4/2026</a:t>
+              <a:t>6/15/2026</a:t>
             </a:fld>
             <a:endParaRPr lang="en-US"/>
           </a:p>
@@ -1276,7 +1569,7 @@
           <a:p>
             <a:fld id="{505F9A76-AE69-4078-B0A8-C46378DD53B3}" type="datetimeFigureOut">
               <a:rPr lang="en-US" smtClean="0"/>
-              <a:t>5/4/2026</a:t>
+              <a:t>6/15/2026</a:t>
             </a:fld>
             <a:endParaRPr lang="en-US"/>
           </a:p>
@@ -1730,7 +2023,7 @@
           <a:p>
             <a:fld id="{505F9A76-AE69-4078-B0A8-C46378DD53B3}" type="datetimeFigureOut">
               <a:rPr lang="en-US" smtClean="0"/>
-              <a:t>5/4/2026</a:t>
+              <a:t>6/15/2026</a:t>
             </a:fld>
             <a:endParaRPr lang="en-US"/>
           </a:p>
@@ -2005,7 +2298,7 @@
           <a:p>
             <a:fld id="{505F9A76-AE69-4078-B0A8-C46378DD53B3}" type="datetimeFigureOut">
               <a:rPr lang="en-US" smtClean="0"/>
-              <a:t>5/4/2026</a:t>
+              <a:t>6/15/2026</a:t>
             </a:fld>
             <a:endParaRPr lang="en-US"/>
           </a:p>
@@ -2270,7 +2563,7 @@
           <a:p>
             <a:fld id="{505F9A76-AE69-4078-B0A8-C46378DD53B3}" type="datetimeFigureOut">
               <a:rPr lang="en-US" smtClean="0"/>
-              <a:t>5/4/2026</a:t>
+              <a:t>6/15/2026</a:t>
             </a:fld>
             <a:endParaRPr lang="en-US"/>
           </a:p>
@@ -2682,7 +2975,7 @@
           <a:p>
             <a:fld id="{505F9A76-AE69-4078-B0A8-C46378DD53B3}" type="datetimeFigureOut">
               <a:rPr lang="en-US" smtClean="0"/>
-              <a:t>5/4/2026</a:t>
+              <a:t>6/15/2026</a:t>
             </a:fld>
             <a:endParaRPr lang="en-US"/>
           </a:p>
@@ -2823,7 +3116,7 @@
           <a:p>
             <a:fld id="{505F9A76-AE69-4078-B0A8-C46378DD53B3}" type="datetimeFigureOut">
               <a:rPr lang="en-US" smtClean="0"/>
-              <a:t>5/4/2026</a:t>
+              <a:t>6/15/2026</a:t>
             </a:fld>
             <a:endParaRPr lang="en-US"/>
           </a:p>
@@ -2936,7 +3229,7 @@
           <a:p>
             <a:fld id="{505F9A76-AE69-4078-B0A8-C46378DD53B3}" type="datetimeFigureOut">
               <a:rPr lang="en-US" smtClean="0"/>
-              <a:t>5/4/2026</a:t>
+              <a:t>6/15/2026</a:t>
             </a:fld>
             <a:endParaRPr lang="en-US"/>
           </a:p>
@@ -3247,7 +3540,7 @@
           <a:p>
             <a:fld id="{505F9A76-AE69-4078-B0A8-C46378DD53B3}" type="datetimeFigureOut">
               <a:rPr lang="en-US" smtClean="0"/>
-              <a:t>5/4/2026</a:t>
+              <a:t>6/15/2026</a:t>
             </a:fld>
             <a:endParaRPr lang="en-US"/>
           </a:p>
@@ -3535,7 +3828,7 @@
           <a:p>
             <a:fld id="{505F9A76-AE69-4078-B0A8-C46378DD53B3}" type="datetimeFigureOut">
               <a:rPr lang="en-US" smtClean="0"/>
-              <a:t>5/4/2026</a:t>
+              <a:t>6/15/2026</a:t>
             </a:fld>
             <a:endParaRPr lang="en-US"/>
           </a:p>
@@ -3776,7 +4069,7 @@
           <a:p>
             <a:fld id="{505F9A76-AE69-4078-B0A8-C46378DD53B3}" type="datetimeFigureOut">
               <a:rPr lang="en-US" smtClean="0"/>
-              <a:t>5/4/2026</a:t>
+              <a:t>6/15/2026</a:t>
             </a:fld>
             <a:endParaRPr lang="en-US"/>
           </a:p>
@@ -4289,10 +4582,10 @@
       </p:cxnSp>
       <p:grpSp>
         <p:nvGrpSpPr>
-          <p:cNvPr id="6" name="Group 5">
-            <a:extLst>
-              <a:ext uri="{FF2B5EF4-FFF2-40B4-BE49-F238E27FC236}">
-                <a16:creationId xmlns:a16="http://schemas.microsoft.com/office/drawing/2014/main" id="{25D110F2-12FD-0F6F-F1A1-CE43E82653E1}"/>
+          <p:cNvPr id="14" name="Group 13">
+            <a:extLst>
+              <a:ext uri="{FF2B5EF4-FFF2-40B4-BE49-F238E27FC236}">
+                <a16:creationId xmlns:a16="http://schemas.microsoft.com/office/drawing/2014/main" id="{71BFAF28-9674-31F2-A503-1B2C6BFA9EB8}"/>
               </a:ext>
             </a:extLst>
           </p:cNvPr>
@@ -4301,18 +4594,18 @@
         </p:nvGrpSpPr>
         <p:grpSpPr>
           <a:xfrm>
-            <a:off x="4884176" y="1899766"/>
-            <a:ext cx="1682216" cy="1179126"/>
-            <a:chOff x="820748" y="1738059"/>
-            <a:chExt cx="1682216" cy="1179126"/>
+            <a:off x="747252" y="1327355"/>
+            <a:ext cx="11421291" cy="4925956"/>
+            <a:chOff x="747252" y="1327355"/>
+            <a:chExt cx="11421291" cy="4925956"/>
           </a:xfrm>
         </p:grpSpPr>
         <p:sp>
           <p:nvSpPr>
-            <p:cNvPr id="5" name="Rectangle 4">
+            <p:cNvPr id="10" name="Rectangle 9">
               <a:extLst>
                 <a:ext uri="{FF2B5EF4-FFF2-40B4-BE49-F238E27FC236}">
-                  <a16:creationId xmlns:a16="http://schemas.microsoft.com/office/drawing/2014/main" id="{B537C711-FC49-20B0-7F7F-CE0173327951}"/>
+                  <a16:creationId xmlns:a16="http://schemas.microsoft.com/office/drawing/2014/main" id="{E5AFB95E-8465-5D25-CC2C-95DF00038DD7}"/>
                 </a:ext>
               </a:extLst>
             </p:cNvPr>
@@ -4321,8 +4614,8 @@
           </p:nvSpPr>
           <p:spPr>
             <a:xfrm>
-              <a:off x="914400" y="1738059"/>
-              <a:ext cx="1528654" cy="1179126"/>
+              <a:off x="747252" y="1327355"/>
+              <a:ext cx="11421291" cy="4925956"/>
             </a:xfrm>
             <a:prstGeom prst="rect">
               <a:avLst/>
@@ -4363,10 +4656,10 @@
         </p:sp>
         <p:grpSp>
           <p:nvGrpSpPr>
-            <p:cNvPr id="4" name="Group 3">
+            <p:cNvPr id="2" name="Group 1">
               <a:extLst>
                 <a:ext uri="{FF2B5EF4-FFF2-40B4-BE49-F238E27FC236}">
-                  <a16:creationId xmlns:a16="http://schemas.microsoft.com/office/drawing/2014/main" id="{624400FB-4966-D3DF-B2A9-6C9836F3D36A}"/>
+                  <a16:creationId xmlns:a16="http://schemas.microsoft.com/office/drawing/2014/main" id="{21056180-46C7-2AAB-739D-5D96A64551A3}"/>
                 </a:ext>
               </a:extLst>
             </p:cNvPr>
@@ -4375,18 +4668,201 @@
           </p:nvGrpSpPr>
           <p:grpSpPr>
             <a:xfrm>
-              <a:off x="820748" y="1787691"/>
-              <a:ext cx="1682216" cy="1129494"/>
-              <a:chOff x="622925" y="1710812"/>
-              <a:chExt cx="1682216" cy="1129494"/>
+              <a:off x="865574" y="1452829"/>
+              <a:ext cx="11151926" cy="4526490"/>
+              <a:chOff x="865574" y="1452829"/>
+              <a:chExt cx="11151926" cy="4526490"/>
             </a:xfrm>
           </p:grpSpPr>
+          <p:grpSp>
+            <p:nvGrpSpPr>
+              <p:cNvPr id="6" name="Group 5">
+                <a:extLst>
+                  <a:ext uri="{FF2B5EF4-FFF2-40B4-BE49-F238E27FC236}">
+                    <a16:creationId xmlns:a16="http://schemas.microsoft.com/office/drawing/2014/main" id="{25D110F2-12FD-0F6F-F1A1-CE43E82653E1}"/>
+                  </a:ext>
+                </a:extLst>
+              </p:cNvPr>
+              <p:cNvGrpSpPr/>
+              <p:nvPr/>
+            </p:nvGrpSpPr>
+            <p:grpSpPr>
+              <a:xfrm>
+                <a:off x="4884176" y="1899766"/>
+                <a:ext cx="1682216" cy="1179126"/>
+                <a:chOff x="820748" y="1738059"/>
+                <a:chExt cx="1682216" cy="1179126"/>
+              </a:xfrm>
+            </p:grpSpPr>
+            <p:sp>
+              <p:nvSpPr>
+                <p:cNvPr id="5" name="Rectangle 4">
+                  <a:extLst>
+                    <a:ext uri="{FF2B5EF4-FFF2-40B4-BE49-F238E27FC236}">
+                      <a16:creationId xmlns:a16="http://schemas.microsoft.com/office/drawing/2014/main" id="{B537C711-FC49-20B0-7F7F-CE0173327951}"/>
+                    </a:ext>
+                  </a:extLst>
+                </p:cNvPr>
+                <p:cNvSpPr/>
+                <p:nvPr/>
+              </p:nvSpPr>
+              <p:spPr>
+                <a:xfrm>
+                  <a:off x="914400" y="1738059"/>
+                  <a:ext cx="1528654" cy="1179126"/>
+                </a:xfrm>
+                <a:prstGeom prst="rect">
+                  <a:avLst/>
+                </a:prstGeom>
+                <a:solidFill>
+                  <a:schemeClr val="bg1"/>
+                </a:solidFill>
+                <a:ln>
+                  <a:solidFill>
+                    <a:schemeClr val="tx1"/>
+                  </a:solidFill>
+                </a:ln>
+              </p:spPr>
+              <p:style>
+                <a:lnRef idx="2">
+                  <a:schemeClr val="accent1">
+                    <a:shade val="15000"/>
+                  </a:schemeClr>
+                </a:lnRef>
+                <a:fillRef idx="1">
+                  <a:schemeClr val="accent1"/>
+                </a:fillRef>
+                <a:effectRef idx="0">
+                  <a:schemeClr val="accent1"/>
+                </a:effectRef>
+                <a:fontRef idx="minor">
+                  <a:schemeClr val="lt1"/>
+                </a:fontRef>
+              </p:style>
+              <p:txBody>
+                <a:bodyPr rtlCol="0" anchor="ctr"/>
+                <a:lstStyle/>
+                <a:p>
+                  <a:pPr algn="ctr"/>
+                  <a:endParaRPr lang="en-US"/>
+                </a:p>
+              </p:txBody>
+            </p:sp>
+            <p:grpSp>
+              <p:nvGrpSpPr>
+                <p:cNvPr id="4" name="Group 3">
+                  <a:extLst>
+                    <a:ext uri="{FF2B5EF4-FFF2-40B4-BE49-F238E27FC236}">
+                      <a16:creationId xmlns:a16="http://schemas.microsoft.com/office/drawing/2014/main" id="{624400FB-4966-D3DF-B2A9-6C9836F3D36A}"/>
+                    </a:ext>
+                  </a:extLst>
+                </p:cNvPr>
+                <p:cNvGrpSpPr/>
+                <p:nvPr/>
+              </p:nvGrpSpPr>
+              <p:grpSpPr>
+                <a:xfrm>
+                  <a:off x="820748" y="1787691"/>
+                  <a:ext cx="1682216" cy="1129494"/>
+                  <a:chOff x="622925" y="1710812"/>
+                  <a:chExt cx="1682216" cy="1129494"/>
+                </a:xfrm>
+              </p:grpSpPr>
+              <p:sp>
+                <p:nvSpPr>
+                  <p:cNvPr id="3" name="TextBox 2">
+                    <a:extLst>
+                      <a:ext uri="{FF2B5EF4-FFF2-40B4-BE49-F238E27FC236}">
+                        <a16:creationId xmlns:a16="http://schemas.microsoft.com/office/drawing/2014/main" id="{D1030ECF-D9EC-DFA5-9005-9FBB79C0DC2B}"/>
+                      </a:ext>
+                    </a:extLst>
+                  </p:cNvPr>
+                  <p:cNvSpPr txBox="1"/>
+                  <p:nvPr/>
+                </p:nvSpPr>
+                <p:spPr>
+                  <a:xfrm>
+                    <a:off x="622925" y="2470974"/>
+                    <a:ext cx="1682216" cy="369332"/>
+                  </a:xfrm>
+                  <a:prstGeom prst="rect">
+                    <a:avLst/>
+                  </a:prstGeom>
+                  <a:noFill/>
+                  <a:ln>
+                    <a:noFill/>
+                  </a:ln>
+                </p:spPr>
+                <p:txBody>
+                  <a:bodyPr wrap="square" rtlCol="0">
+                    <a:spAutoFit/>
+                  </a:bodyPr>
+                  <a:lstStyle/>
+                  <a:p>
+                    <a:pPr algn="ctr"/>
+                    <a:r>
+                      <a:rPr lang="en-US" dirty="0" err="1"/>
+                      <a:t>est_passage.R</a:t>
+                    </a:r>
+                    <a:endParaRPr lang="en-US" dirty="0"/>
+                  </a:p>
+                </p:txBody>
+              </p:sp>
+              <p:pic>
+                <p:nvPicPr>
+                  <p:cNvPr id="1026" name="Picture 2">
+                    <a:extLst>
+                      <a:ext uri="{FF2B5EF4-FFF2-40B4-BE49-F238E27FC236}">
+                        <a16:creationId xmlns:a16="http://schemas.microsoft.com/office/drawing/2014/main" id="{196AFB0A-0EA2-8BC7-ECD8-BADFB3C3301B}"/>
+                      </a:ext>
+                    </a:extLst>
+                  </p:cNvPr>
+                  <p:cNvPicPr>
+                    <a:picLocks noChangeAspect="1" noChangeArrowheads="1"/>
+                  </p:cNvPicPr>
+                  <p:nvPr/>
+                </p:nvPicPr>
+                <p:blipFill>
+                  <a:blip r:embed="rId3">
+                    <a:extLst>
+                      <a:ext uri="{28A0092B-C50C-407E-A947-70E740481C1C}">
+                        <a14:useLocalDpi xmlns:a14="http://schemas.microsoft.com/office/drawing/2010/main" val="0"/>
+                      </a:ext>
+                    </a:extLst>
+                  </a:blip>
+                  <a:srcRect/>
+                  <a:stretch>
+                    <a:fillRect/>
+                  </a:stretch>
+                </p:blipFill>
+                <p:spPr bwMode="auto">
+                  <a:xfrm>
+                    <a:off x="973623" y="1710812"/>
+                    <a:ext cx="980820" cy="760162"/>
+                  </a:xfrm>
+                  <a:prstGeom prst="rect">
+                    <a:avLst/>
+                  </a:prstGeom>
+                  <a:noFill/>
+                  <a:extLst>
+                    <a:ext uri="{909E8E84-426E-40DD-AFC4-6F175D3DCCD1}">
+                      <a14:hiddenFill xmlns:a14="http://schemas.microsoft.com/office/drawing/2010/main">
+                        <a:solidFill>
+                          <a:srgbClr val="FFFFFF"/>
+                        </a:solidFill>
+                      </a14:hiddenFill>
+                    </a:ext>
+                  </a:extLst>
+                </p:spPr>
+              </p:pic>
+            </p:grpSp>
+          </p:grpSp>
           <p:sp>
             <p:nvSpPr>
-              <p:cNvPr id="3" name="TextBox 2">
+              <p:cNvPr id="9" name="TextBox 8">
                 <a:extLst>
                   <a:ext uri="{FF2B5EF4-FFF2-40B4-BE49-F238E27FC236}">
-                    <a16:creationId xmlns:a16="http://schemas.microsoft.com/office/drawing/2014/main" id="{D1030ECF-D9EC-DFA5-9005-9FBB79C0DC2B}"/>
+                    <a16:creationId xmlns:a16="http://schemas.microsoft.com/office/drawing/2014/main" id="{28F64EF9-07A5-7B0F-7CB8-AE4ABE98B892}"/>
                   </a:ext>
                 </a:extLst>
               </p:cNvPr>
@@ -4395,15 +4871,131 @@
             </p:nvSpPr>
             <p:spPr>
               <a:xfrm>
-                <a:off x="622925" y="2470974"/>
-                <a:ext cx="1682216" cy="369332"/>
+                <a:off x="865574" y="1452829"/>
+                <a:ext cx="1731078" cy="1323439"/>
+              </a:xfrm>
+              <a:prstGeom prst="rect">
+                <a:avLst/>
+              </a:prstGeom>
+              <a:solidFill>
+                <a:schemeClr val="accent6">
+                  <a:lumMod val="40000"/>
+                  <a:lumOff val="60000"/>
+                </a:schemeClr>
+              </a:solidFill>
+              <a:ln>
+                <a:solidFill>
+                  <a:schemeClr val="tx1"/>
+                </a:solidFill>
+              </a:ln>
+            </p:spPr>
+            <p:txBody>
+              <a:bodyPr wrap="square" rtlCol="0">
+                <a:spAutoFit/>
+              </a:bodyPr>
+              <a:lstStyle/>
+              <a:p>
+                <a:r>
+                  <a:rPr lang="en-US" sz="1600" b="1" u="sng" dirty="0"/>
+                  <a:t>Data Inputs</a:t>
+                </a:r>
+              </a:p>
+              <a:p>
+                <a:r>
+                  <a:rPr lang="en-US" sz="1600" dirty="0" err="1"/>
+                  <a:t>catch_data</a:t>
+                </a:r>
+                <a:endParaRPr lang="en-US" sz="1600" dirty="0"/>
+              </a:p>
+              <a:p>
+                <a:r>
+                  <a:rPr lang="en-US" sz="1600" dirty="0" err="1"/>
+                  <a:t>visit_data</a:t>
+                </a:r>
+                <a:endParaRPr lang="en-US" sz="1600" dirty="0"/>
+              </a:p>
+              <a:p>
+                <a:r>
+                  <a:rPr lang="en-US" sz="1600" dirty="0" err="1"/>
+                  <a:t>release_data</a:t>
+                </a:r>
+                <a:endParaRPr lang="en-US" sz="1600" dirty="0"/>
+              </a:p>
+              <a:p>
+                <a:r>
+                  <a:rPr lang="en-US" sz="1600" dirty="0" err="1"/>
+                  <a:t>recapture_data</a:t>
+                </a:r>
+                <a:endParaRPr lang="en-US" sz="1600" dirty="0"/>
+              </a:p>
+            </p:txBody>
+          </p:sp>
+          <p:cxnSp>
+            <p:nvCxnSpPr>
+              <p:cNvPr id="11" name="Straight Arrow Connector 10">
+                <a:extLst>
+                  <a:ext uri="{FF2B5EF4-FFF2-40B4-BE49-F238E27FC236}">
+                    <a16:creationId xmlns:a16="http://schemas.microsoft.com/office/drawing/2014/main" id="{E2D8E6E7-479F-FE34-B14F-53FE5637BCEA}"/>
+                  </a:ext>
+                </a:extLst>
+              </p:cNvPr>
+              <p:cNvCxnSpPr>
+                <a:cxnSpLocks/>
+              </p:cNvCxnSpPr>
+              <p:nvPr/>
+            </p:nvCxnSpPr>
+            <p:spPr>
+              <a:xfrm>
+                <a:off x="2657245" y="1996506"/>
+                <a:ext cx="2226931" cy="438410"/>
+              </a:xfrm>
+              <a:prstGeom prst="straightConnector1">
+                <a:avLst/>
+              </a:prstGeom>
+              <a:ln w="76200">
+                <a:tailEnd type="triangle"/>
+              </a:ln>
+            </p:spPr>
+            <p:style>
+              <a:lnRef idx="2">
+                <a:schemeClr val="accent1"/>
+              </a:lnRef>
+              <a:fillRef idx="0">
+                <a:schemeClr val="accent1"/>
+              </a:fillRef>
+              <a:effectRef idx="1">
+                <a:schemeClr val="accent1"/>
+              </a:effectRef>
+              <a:fontRef idx="minor">
+                <a:schemeClr val="tx1"/>
+              </a:fontRef>
+            </p:style>
+          </p:cxnSp>
+          <p:sp>
+            <p:nvSpPr>
+              <p:cNvPr id="15" name="TextBox 14">
+                <a:extLst>
+                  <a:ext uri="{FF2B5EF4-FFF2-40B4-BE49-F238E27FC236}">
+                    <a16:creationId xmlns:a16="http://schemas.microsoft.com/office/drawing/2014/main" id="{154CC95C-BB11-AE31-622B-74A6623D944A}"/>
+                  </a:ext>
+                </a:extLst>
+              </p:cNvPr>
+              <p:cNvSpPr txBox="1"/>
+              <p:nvPr/>
+            </p:nvSpPr>
+            <p:spPr>
+              <a:xfrm>
+                <a:off x="2943749" y="4227667"/>
+                <a:ext cx="1408278" cy="369332"/>
               </a:xfrm>
               <a:prstGeom prst="rect">
                 <a:avLst/>
               </a:prstGeom>
               <a:noFill/>
               <a:ln>
-                <a:noFill/>
+                <a:solidFill>
+                  <a:schemeClr val="tx1"/>
+                </a:solidFill>
               </a:ln>
             </p:spPr>
             <p:txBody>
@@ -4415,1379 +5007,1320 @@
                 <a:pPr algn="ctr"/>
                 <a:r>
                   <a:rPr lang="en-US" dirty="0" err="1"/>
-                  <a:t>est_passage.R</a:t>
+                  <a:t>est_catch.R</a:t>
                 </a:r>
                 <a:endParaRPr lang="en-US" dirty="0"/>
               </a:p>
             </p:txBody>
           </p:sp>
-          <p:pic>
-            <p:nvPicPr>
-              <p:cNvPr id="1026" name="Picture 2">
+          <p:sp>
+            <p:nvSpPr>
+              <p:cNvPr id="24" name="TextBox 23">
                 <a:extLst>
                   <a:ext uri="{FF2B5EF4-FFF2-40B4-BE49-F238E27FC236}">
-                    <a16:creationId xmlns:a16="http://schemas.microsoft.com/office/drawing/2014/main" id="{196AFB0A-0EA2-8BC7-ECD8-BADFB3C3301B}"/>
+                    <a16:creationId xmlns:a16="http://schemas.microsoft.com/office/drawing/2014/main" id="{38A56400-E96D-A5B7-9A2F-CB0347AD6A34}"/>
                   </a:ext>
                 </a:extLst>
               </p:cNvPr>
-              <p:cNvPicPr>
-                <a:picLocks noChangeAspect="1" noChangeArrowheads="1"/>
-              </p:cNvPicPr>
+              <p:cNvSpPr txBox="1"/>
               <p:nvPr/>
-            </p:nvPicPr>
-            <p:blipFill>
-              <a:blip r:embed="rId3">
-                <a:extLst>
-                  <a:ext uri="{28A0092B-C50C-407E-A947-70E740481C1C}">
-                    <a14:useLocalDpi xmlns:a14="http://schemas.microsoft.com/office/drawing/2010/main" val="0"/>
-                  </a:ext>
-                </a:extLst>
-              </a:blip>
-              <a:srcRect/>
-              <a:stretch>
-                <a:fillRect/>
-              </a:stretch>
-            </p:blipFill>
-            <p:spPr bwMode="auto">
+            </p:nvSpPr>
+            <p:spPr>
               <a:xfrm>
-                <a:off x="973623" y="1710812"/>
-                <a:ext cx="980820" cy="760162"/>
+                <a:off x="7555949" y="4213823"/>
+                <a:ext cx="1588564" cy="338554"/>
               </a:xfrm>
               <a:prstGeom prst="rect">
                 <a:avLst/>
               </a:prstGeom>
               <a:noFill/>
-              <a:extLst>
-                <a:ext uri="{909E8E84-426E-40DD-AFC4-6F175D3DCCD1}">
-                  <a14:hiddenFill xmlns:a14="http://schemas.microsoft.com/office/drawing/2010/main">
-                    <a:solidFill>
-                      <a:srgbClr val="FFFFFF"/>
-                    </a:solidFill>
-                  </a14:hiddenFill>
-                </a:ext>
-              </a:extLst>
+              <a:ln>
+                <a:solidFill>
+                  <a:schemeClr val="tx1"/>
+                </a:solidFill>
+              </a:ln>
             </p:spPr>
-          </p:pic>
+            <p:txBody>
+              <a:bodyPr wrap="square" rtlCol="0">
+                <a:spAutoFit/>
+              </a:bodyPr>
+              <a:lstStyle/>
+              <a:p>
+                <a:pPr algn="ctr"/>
+                <a:r>
+                  <a:rPr lang="en-US" sz="1600" dirty="0" err="1"/>
+                  <a:t>est_efficiency.R</a:t>
+                </a:r>
+                <a:endParaRPr lang="en-US" sz="1600" dirty="0"/>
+              </a:p>
+            </p:txBody>
+          </p:sp>
+          <p:sp>
+            <p:nvSpPr>
+              <p:cNvPr id="30" name="TextBox 29">
+                <a:extLst>
+                  <a:ext uri="{FF2B5EF4-FFF2-40B4-BE49-F238E27FC236}">
+                    <a16:creationId xmlns:a16="http://schemas.microsoft.com/office/drawing/2014/main" id="{DEEA24D1-B2C4-ECEF-247D-D1E3C3B0FD1D}"/>
+                  </a:ext>
+                </a:extLst>
+              </p:cNvPr>
+              <p:cNvSpPr txBox="1"/>
+              <p:nvPr/>
+            </p:nvSpPr>
+            <p:spPr>
+              <a:xfrm>
+                <a:off x="869461" y="2963397"/>
+                <a:ext cx="1731078" cy="1569660"/>
+              </a:xfrm>
+              <a:prstGeom prst="rect">
+                <a:avLst/>
+              </a:prstGeom>
+              <a:solidFill>
+                <a:schemeClr val="tx2">
+                  <a:lumMod val="10000"/>
+                  <a:lumOff val="90000"/>
+                </a:schemeClr>
+              </a:solidFill>
+              <a:ln>
+                <a:solidFill>
+                  <a:schemeClr val="tx1"/>
+                </a:solidFill>
+              </a:ln>
+            </p:spPr>
+            <p:txBody>
+              <a:bodyPr wrap="square" rtlCol="0">
+                <a:spAutoFit/>
+              </a:bodyPr>
+              <a:lstStyle/>
+              <a:p>
+                <a:r>
+                  <a:rPr lang="en-US" sz="1600" b="1" u="sng" dirty="0"/>
+                  <a:t>User Inputs</a:t>
+                </a:r>
+              </a:p>
+              <a:p>
+                <a:r>
+                  <a:rPr lang="en-US" sz="1600" dirty="0"/>
+                  <a:t>summarize.by</a:t>
+                </a:r>
+              </a:p>
+              <a:p>
+                <a:r>
+                  <a:rPr lang="en-US" sz="1600" dirty="0"/>
+                  <a:t>bootstrap</a:t>
+                </a:r>
+              </a:p>
+              <a:p>
+                <a:r>
+                  <a:rPr lang="en-US" sz="1600" dirty="0" err="1"/>
+                  <a:t>impute_all</a:t>
+                </a:r>
+                <a:endParaRPr lang="en-US" sz="1600" dirty="0"/>
+              </a:p>
+              <a:p>
+                <a:r>
+                  <a:rPr lang="en-US" sz="1600" dirty="0" err="1"/>
+                  <a:t>survey_start</a:t>
+                </a:r>
+                <a:endParaRPr lang="en-US" sz="1600" dirty="0"/>
+              </a:p>
+              <a:p>
+                <a:r>
+                  <a:rPr lang="en-US" sz="1600" dirty="0" err="1"/>
+                  <a:t>survey_end</a:t>
+                </a:r>
+                <a:endParaRPr lang="en-US" sz="1600" dirty="0"/>
+              </a:p>
+            </p:txBody>
+          </p:sp>
+          <p:cxnSp>
+            <p:nvCxnSpPr>
+              <p:cNvPr id="31" name="Straight Arrow Connector 30">
+                <a:extLst>
+                  <a:ext uri="{FF2B5EF4-FFF2-40B4-BE49-F238E27FC236}">
+                    <a16:creationId xmlns:a16="http://schemas.microsoft.com/office/drawing/2014/main" id="{A1FF2BE4-9407-51CD-9B0D-0B8883DB2B44}"/>
+                  </a:ext>
+                </a:extLst>
+              </p:cNvPr>
+              <p:cNvCxnSpPr>
+                <a:cxnSpLocks/>
+              </p:cNvCxnSpPr>
+              <p:nvPr/>
+            </p:nvCxnSpPr>
+            <p:spPr>
+              <a:xfrm flipV="1">
+                <a:off x="2572400" y="2750675"/>
+                <a:ext cx="2262381" cy="566495"/>
+              </a:xfrm>
+              <a:prstGeom prst="straightConnector1">
+                <a:avLst/>
+              </a:prstGeom>
+              <a:ln w="76200">
+                <a:tailEnd type="triangle"/>
+              </a:ln>
+            </p:spPr>
+            <p:style>
+              <a:lnRef idx="2">
+                <a:schemeClr val="accent1"/>
+              </a:lnRef>
+              <a:fillRef idx="0">
+                <a:schemeClr val="accent1"/>
+              </a:fillRef>
+              <a:effectRef idx="1">
+                <a:schemeClr val="accent1"/>
+              </a:effectRef>
+              <a:fontRef idx="minor">
+                <a:schemeClr val="tx1"/>
+              </a:fontRef>
+            </p:style>
+          </p:cxnSp>
+          <p:cxnSp>
+            <p:nvCxnSpPr>
+              <p:cNvPr id="63" name="Straight Arrow Connector 62">
+                <a:extLst>
+                  <a:ext uri="{FF2B5EF4-FFF2-40B4-BE49-F238E27FC236}">
+                    <a16:creationId xmlns:a16="http://schemas.microsoft.com/office/drawing/2014/main" id="{7A31B61B-730C-567F-A193-23F44D3325B4}"/>
+                  </a:ext>
+                </a:extLst>
+              </p:cNvPr>
+              <p:cNvCxnSpPr>
+                <a:cxnSpLocks/>
+              </p:cNvCxnSpPr>
+              <p:nvPr/>
+            </p:nvCxnSpPr>
+            <p:spPr>
+              <a:xfrm flipH="1">
+                <a:off x="4236043" y="3203809"/>
+                <a:ext cx="867043" cy="945346"/>
+              </a:xfrm>
+              <a:prstGeom prst="straightConnector1">
+                <a:avLst/>
+              </a:prstGeom>
+              <a:ln w="38100">
+                <a:headEnd type="triangle"/>
+                <a:tailEnd type="triangle"/>
+              </a:ln>
+            </p:spPr>
+            <p:style>
+              <a:lnRef idx="2">
+                <a:schemeClr val="accent1"/>
+              </a:lnRef>
+              <a:fillRef idx="0">
+                <a:schemeClr val="accent1"/>
+              </a:fillRef>
+              <a:effectRef idx="1">
+                <a:schemeClr val="accent1"/>
+              </a:effectRef>
+              <a:fontRef idx="minor">
+                <a:schemeClr val="tx1"/>
+              </a:fontRef>
+            </p:style>
+          </p:cxnSp>
+          <p:sp>
+            <p:nvSpPr>
+              <p:cNvPr id="1031" name="TextBox 1030">
+                <a:extLst>
+                  <a:ext uri="{FF2B5EF4-FFF2-40B4-BE49-F238E27FC236}">
+                    <a16:creationId xmlns:a16="http://schemas.microsoft.com/office/drawing/2014/main" id="{DC0FB80F-440C-57BF-55C8-97C043471AA2}"/>
+                  </a:ext>
+                </a:extLst>
+              </p:cNvPr>
+              <p:cNvSpPr txBox="1"/>
+              <p:nvPr/>
+            </p:nvSpPr>
+            <p:spPr>
+              <a:xfrm>
+                <a:off x="5103086" y="4161278"/>
+                <a:ext cx="1682216" cy="507831"/>
+              </a:xfrm>
+              <a:prstGeom prst="rect">
+                <a:avLst/>
+              </a:prstGeom>
+              <a:noFill/>
+              <a:ln>
+                <a:solidFill>
+                  <a:schemeClr val="tx1"/>
+                </a:solidFill>
+              </a:ln>
+            </p:spPr>
+            <p:txBody>
+              <a:bodyPr wrap="square" rtlCol="0">
+                <a:spAutoFit/>
+              </a:bodyPr>
+              <a:lstStyle/>
+              <a:p>
+                <a:r>
+                  <a:rPr lang="en-US" sz="900" dirty="0" err="1"/>
+                  <a:t>calculate_sampling_time.R</a:t>
+                </a:r>
+                <a:endParaRPr lang="en-US" sz="900" dirty="0"/>
+              </a:p>
+              <a:p>
+                <a:r>
+                  <a:rPr lang="en-US" sz="900" dirty="0" err="1"/>
+                  <a:t>fix_dates.R</a:t>
+                </a:r>
+                <a:endParaRPr lang="en-US" sz="900" dirty="0"/>
+              </a:p>
+              <a:p>
+                <a:r>
+                  <a:rPr lang="en-US" sz="900" dirty="0" err="1"/>
+                  <a:t>assign_batch_date.R</a:t>
+                </a:r>
+                <a:endParaRPr lang="en-US" sz="900" dirty="0"/>
+              </a:p>
+            </p:txBody>
+          </p:sp>
+          <p:cxnSp>
+            <p:nvCxnSpPr>
+              <p:cNvPr id="1050" name="Straight Arrow Connector 1049">
+                <a:extLst>
+                  <a:ext uri="{FF2B5EF4-FFF2-40B4-BE49-F238E27FC236}">
+                    <a16:creationId xmlns:a16="http://schemas.microsoft.com/office/drawing/2014/main" id="{F6B15FE2-1A22-4B89-431F-05A455CD8EC9}"/>
+                  </a:ext>
+                </a:extLst>
+              </p:cNvPr>
+              <p:cNvCxnSpPr>
+                <a:cxnSpLocks/>
+              </p:cNvCxnSpPr>
+              <p:nvPr/>
+            </p:nvCxnSpPr>
+            <p:spPr>
+              <a:xfrm>
+                <a:off x="6393712" y="3243670"/>
+                <a:ext cx="1157999" cy="850847"/>
+              </a:xfrm>
+              <a:prstGeom prst="straightConnector1">
+                <a:avLst/>
+              </a:prstGeom>
+              <a:ln w="38100">
+                <a:headEnd type="triangle"/>
+                <a:tailEnd type="triangle"/>
+              </a:ln>
+            </p:spPr>
+            <p:style>
+              <a:lnRef idx="2">
+                <a:schemeClr val="accent1"/>
+              </a:lnRef>
+              <a:fillRef idx="0">
+                <a:schemeClr val="accent1"/>
+              </a:fillRef>
+              <a:effectRef idx="1">
+                <a:schemeClr val="accent1"/>
+              </a:effectRef>
+              <a:fontRef idx="minor">
+                <a:schemeClr val="tx1"/>
+              </a:fontRef>
+            </p:style>
+          </p:cxnSp>
+          <p:cxnSp>
+            <p:nvCxnSpPr>
+              <p:cNvPr id="1055" name="Straight Arrow Connector 1054">
+                <a:extLst>
+                  <a:ext uri="{FF2B5EF4-FFF2-40B4-BE49-F238E27FC236}">
+                    <a16:creationId xmlns:a16="http://schemas.microsoft.com/office/drawing/2014/main" id="{A524965F-0CC9-C8F9-C056-43F46E6EC10C}"/>
+                  </a:ext>
+                </a:extLst>
+              </p:cNvPr>
+              <p:cNvCxnSpPr>
+                <a:cxnSpLocks/>
+              </p:cNvCxnSpPr>
+              <p:nvPr/>
+            </p:nvCxnSpPr>
+            <p:spPr>
+              <a:xfrm flipH="1">
+                <a:off x="4393716" y="4231185"/>
+                <a:ext cx="663443" cy="485"/>
+              </a:xfrm>
+              <a:prstGeom prst="straightConnector1">
+                <a:avLst/>
+              </a:prstGeom>
+              <a:ln w="38100">
+                <a:headEnd type="triangle"/>
+                <a:tailEnd type="triangle"/>
+              </a:ln>
+            </p:spPr>
+            <p:style>
+              <a:lnRef idx="2">
+                <a:schemeClr val="accent1"/>
+              </a:lnRef>
+              <a:fillRef idx="0">
+                <a:schemeClr val="accent1"/>
+              </a:fillRef>
+              <a:effectRef idx="1">
+                <a:schemeClr val="accent1"/>
+              </a:effectRef>
+              <a:fontRef idx="minor">
+                <a:schemeClr val="tx1"/>
+              </a:fontRef>
+            </p:style>
+          </p:cxnSp>
+          <p:cxnSp>
+            <p:nvCxnSpPr>
+              <p:cNvPr id="1060" name="Straight Arrow Connector 1059">
+                <a:extLst>
+                  <a:ext uri="{FF2B5EF4-FFF2-40B4-BE49-F238E27FC236}">
+                    <a16:creationId xmlns:a16="http://schemas.microsoft.com/office/drawing/2014/main" id="{6540CC88-DE68-A83C-90A0-DB163BD2B8AD}"/>
+                  </a:ext>
+                </a:extLst>
+              </p:cNvPr>
+              <p:cNvCxnSpPr>
+                <a:cxnSpLocks/>
+              </p:cNvCxnSpPr>
+              <p:nvPr/>
+            </p:nvCxnSpPr>
+            <p:spPr>
+              <a:xfrm flipH="1">
+                <a:off x="4397954" y="4383585"/>
+                <a:ext cx="663443" cy="485"/>
+              </a:xfrm>
+              <a:prstGeom prst="straightConnector1">
+                <a:avLst/>
+              </a:prstGeom>
+              <a:ln w="38100">
+                <a:headEnd type="triangle"/>
+                <a:tailEnd type="triangle"/>
+              </a:ln>
+            </p:spPr>
+            <p:style>
+              <a:lnRef idx="2">
+                <a:schemeClr val="accent1"/>
+              </a:lnRef>
+              <a:fillRef idx="0">
+                <a:schemeClr val="accent1"/>
+              </a:fillRef>
+              <a:effectRef idx="1">
+                <a:schemeClr val="accent1"/>
+              </a:effectRef>
+              <a:fontRef idx="minor">
+                <a:schemeClr val="tx1"/>
+              </a:fontRef>
+            </p:style>
+          </p:cxnSp>
+          <p:cxnSp>
+            <p:nvCxnSpPr>
+              <p:cNvPr id="1061" name="Straight Arrow Connector 1060">
+                <a:extLst>
+                  <a:ext uri="{FF2B5EF4-FFF2-40B4-BE49-F238E27FC236}">
+                    <a16:creationId xmlns:a16="http://schemas.microsoft.com/office/drawing/2014/main" id="{4520C1DE-9396-4909-DE37-F4054360DE59}"/>
+                  </a:ext>
+                </a:extLst>
+              </p:cNvPr>
+              <p:cNvCxnSpPr>
+                <a:cxnSpLocks/>
+              </p:cNvCxnSpPr>
+              <p:nvPr/>
+            </p:nvCxnSpPr>
+            <p:spPr>
+              <a:xfrm flipH="1">
+                <a:off x="4395927" y="4550232"/>
+                <a:ext cx="663443" cy="485"/>
+              </a:xfrm>
+              <a:prstGeom prst="straightConnector1">
+                <a:avLst/>
+              </a:prstGeom>
+              <a:ln w="38100">
+                <a:headEnd type="triangle"/>
+                <a:tailEnd type="triangle"/>
+              </a:ln>
+            </p:spPr>
+            <p:style>
+              <a:lnRef idx="2">
+                <a:schemeClr val="accent1"/>
+              </a:lnRef>
+              <a:fillRef idx="0">
+                <a:schemeClr val="accent1"/>
+              </a:fillRef>
+              <a:effectRef idx="1">
+                <a:schemeClr val="accent1"/>
+              </a:effectRef>
+              <a:fontRef idx="minor">
+                <a:schemeClr val="tx1"/>
+              </a:fontRef>
+            </p:style>
+          </p:cxnSp>
+          <p:cxnSp>
+            <p:nvCxnSpPr>
+              <p:cNvPr id="1063" name="Straight Arrow Connector 1062">
+                <a:extLst>
+                  <a:ext uri="{FF2B5EF4-FFF2-40B4-BE49-F238E27FC236}">
+                    <a16:creationId xmlns:a16="http://schemas.microsoft.com/office/drawing/2014/main" id="{F01DE073-C6C2-A481-00B3-74B4A9B878C6}"/>
+                  </a:ext>
+                </a:extLst>
+              </p:cNvPr>
+              <p:cNvCxnSpPr>
+                <a:cxnSpLocks/>
+              </p:cNvCxnSpPr>
+              <p:nvPr/>
+            </p:nvCxnSpPr>
+            <p:spPr>
+              <a:xfrm flipH="1">
+                <a:off x="6838904" y="4230700"/>
+                <a:ext cx="663443" cy="485"/>
+              </a:xfrm>
+              <a:prstGeom prst="straightConnector1">
+                <a:avLst/>
+              </a:prstGeom>
+              <a:ln w="38100">
+                <a:headEnd type="triangle"/>
+                <a:tailEnd type="triangle"/>
+              </a:ln>
+            </p:spPr>
+            <p:style>
+              <a:lnRef idx="2">
+                <a:schemeClr val="accent1"/>
+              </a:lnRef>
+              <a:fillRef idx="0">
+                <a:schemeClr val="accent1"/>
+              </a:fillRef>
+              <a:effectRef idx="1">
+                <a:schemeClr val="accent1"/>
+              </a:effectRef>
+              <a:fontRef idx="minor">
+                <a:schemeClr val="tx1"/>
+              </a:fontRef>
+            </p:style>
+          </p:cxnSp>
+          <p:cxnSp>
+            <p:nvCxnSpPr>
+              <p:cNvPr id="1064" name="Straight Arrow Connector 1063">
+                <a:extLst>
+                  <a:ext uri="{FF2B5EF4-FFF2-40B4-BE49-F238E27FC236}">
+                    <a16:creationId xmlns:a16="http://schemas.microsoft.com/office/drawing/2014/main" id="{138FBE94-5949-9410-F8DE-F23CC3865006}"/>
+                  </a:ext>
+                </a:extLst>
+              </p:cNvPr>
+              <p:cNvCxnSpPr>
+                <a:cxnSpLocks/>
+              </p:cNvCxnSpPr>
+              <p:nvPr/>
+            </p:nvCxnSpPr>
+            <p:spPr>
+              <a:xfrm flipH="1">
+                <a:off x="6843142" y="4383100"/>
+                <a:ext cx="663443" cy="485"/>
+              </a:xfrm>
+              <a:prstGeom prst="straightConnector1">
+                <a:avLst/>
+              </a:prstGeom>
+              <a:ln w="38100">
+                <a:headEnd type="triangle"/>
+                <a:tailEnd type="triangle"/>
+              </a:ln>
+            </p:spPr>
+            <p:style>
+              <a:lnRef idx="2">
+                <a:schemeClr val="accent1"/>
+              </a:lnRef>
+              <a:fillRef idx="0">
+                <a:schemeClr val="accent1"/>
+              </a:fillRef>
+              <a:effectRef idx="1">
+                <a:schemeClr val="accent1"/>
+              </a:effectRef>
+              <a:fontRef idx="minor">
+                <a:schemeClr val="tx1"/>
+              </a:fontRef>
+            </p:style>
+          </p:cxnSp>
+          <p:cxnSp>
+            <p:nvCxnSpPr>
+              <p:cNvPr id="1065" name="Straight Arrow Connector 1064">
+                <a:extLst>
+                  <a:ext uri="{FF2B5EF4-FFF2-40B4-BE49-F238E27FC236}">
+                    <a16:creationId xmlns:a16="http://schemas.microsoft.com/office/drawing/2014/main" id="{CF12B479-3A66-1EE0-DB5D-7F49730250C3}"/>
+                  </a:ext>
+                </a:extLst>
+              </p:cNvPr>
+              <p:cNvCxnSpPr>
+                <a:cxnSpLocks/>
+              </p:cNvCxnSpPr>
+              <p:nvPr/>
+            </p:nvCxnSpPr>
+            <p:spPr>
+              <a:xfrm flipH="1">
+                <a:off x="6841115" y="4549747"/>
+                <a:ext cx="663443" cy="485"/>
+              </a:xfrm>
+              <a:prstGeom prst="straightConnector1">
+                <a:avLst/>
+              </a:prstGeom>
+              <a:ln w="38100">
+                <a:headEnd type="triangle"/>
+                <a:tailEnd type="triangle"/>
+              </a:ln>
+            </p:spPr>
+            <p:style>
+              <a:lnRef idx="2">
+                <a:schemeClr val="accent1"/>
+              </a:lnRef>
+              <a:fillRef idx="0">
+                <a:schemeClr val="accent1"/>
+              </a:fillRef>
+              <a:effectRef idx="1">
+                <a:schemeClr val="accent1"/>
+              </a:effectRef>
+              <a:fontRef idx="minor">
+                <a:schemeClr val="tx1"/>
+              </a:fontRef>
+            </p:style>
+          </p:cxnSp>
+          <p:sp>
+            <p:nvSpPr>
+              <p:cNvPr id="1071" name="TextBox 1070">
+                <a:extLst>
+                  <a:ext uri="{FF2B5EF4-FFF2-40B4-BE49-F238E27FC236}">
+                    <a16:creationId xmlns:a16="http://schemas.microsoft.com/office/drawing/2014/main" id="{6A083AD4-035C-56A8-BE8E-0DDCBA9E2C7A}"/>
+                  </a:ext>
+                </a:extLst>
+              </p:cNvPr>
+              <p:cNvSpPr txBox="1"/>
+              <p:nvPr/>
+            </p:nvSpPr>
+            <p:spPr>
+              <a:xfrm>
+                <a:off x="2806780" y="5056179"/>
+                <a:ext cx="1682216" cy="369332"/>
+              </a:xfrm>
+              <a:prstGeom prst="rect">
+                <a:avLst/>
+              </a:prstGeom>
+              <a:noFill/>
+              <a:ln>
+                <a:solidFill>
+                  <a:schemeClr val="tx1"/>
+                </a:solidFill>
+              </a:ln>
+            </p:spPr>
+            <p:txBody>
+              <a:bodyPr wrap="square" rtlCol="0">
+                <a:spAutoFit/>
+              </a:bodyPr>
+              <a:lstStyle/>
+              <a:p>
+                <a:pPr algn="ctr"/>
+                <a:r>
+                  <a:rPr lang="en-US" dirty="0" err="1"/>
+                  <a:t>model_catch.R</a:t>
+                </a:r>
+                <a:endParaRPr lang="en-US" dirty="0"/>
+              </a:p>
+            </p:txBody>
+          </p:sp>
+          <p:sp>
+            <p:nvSpPr>
+              <p:cNvPr id="1076" name="TextBox 1075">
+                <a:extLst>
+                  <a:ext uri="{FF2B5EF4-FFF2-40B4-BE49-F238E27FC236}">
+                    <a16:creationId xmlns:a16="http://schemas.microsoft.com/office/drawing/2014/main" id="{DBDDDEFA-88A7-BD8F-F61C-85F7784D0B8C}"/>
+                  </a:ext>
+                </a:extLst>
+              </p:cNvPr>
+              <p:cNvSpPr txBox="1"/>
+              <p:nvPr/>
+            </p:nvSpPr>
+            <p:spPr>
+              <a:xfrm>
+                <a:off x="7551871" y="5147385"/>
+                <a:ext cx="1682216" cy="307777"/>
+              </a:xfrm>
+              <a:prstGeom prst="rect">
+                <a:avLst/>
+              </a:prstGeom>
+              <a:noFill/>
+              <a:ln>
+                <a:solidFill>
+                  <a:schemeClr val="tx1"/>
+                </a:solidFill>
+              </a:ln>
+            </p:spPr>
+            <p:txBody>
+              <a:bodyPr wrap="square" rtlCol="0">
+                <a:spAutoFit/>
+              </a:bodyPr>
+              <a:lstStyle/>
+              <a:p>
+                <a:pPr algn="ctr"/>
+                <a:r>
+                  <a:rPr lang="en-US" sz="1400" dirty="0" err="1"/>
+                  <a:t>model_efficiency.R</a:t>
+                </a:r>
+                <a:endParaRPr lang="en-US" sz="1400" dirty="0"/>
+              </a:p>
+            </p:txBody>
+          </p:sp>
+          <p:cxnSp>
+            <p:nvCxnSpPr>
+              <p:cNvPr id="1078" name="Straight Arrow Connector 1077">
+                <a:extLst>
+                  <a:ext uri="{FF2B5EF4-FFF2-40B4-BE49-F238E27FC236}">
+                    <a16:creationId xmlns:a16="http://schemas.microsoft.com/office/drawing/2014/main" id="{EF2776C5-F357-F61C-E9CD-0B58B0F8B695}"/>
+                  </a:ext>
+                </a:extLst>
+              </p:cNvPr>
+              <p:cNvCxnSpPr>
+                <a:cxnSpLocks/>
+              </p:cNvCxnSpPr>
+              <p:nvPr/>
+            </p:nvCxnSpPr>
+            <p:spPr>
+              <a:xfrm flipV="1">
+                <a:off x="3971724" y="4640030"/>
+                <a:ext cx="0" cy="367288"/>
+              </a:xfrm>
+              <a:prstGeom prst="straightConnector1">
+                <a:avLst/>
+              </a:prstGeom>
+              <a:ln w="38100">
+                <a:headEnd type="triangle"/>
+                <a:tailEnd type="triangle"/>
+              </a:ln>
+            </p:spPr>
+            <p:style>
+              <a:lnRef idx="2">
+                <a:schemeClr val="accent1"/>
+              </a:lnRef>
+              <a:fillRef idx="0">
+                <a:schemeClr val="accent1"/>
+              </a:fillRef>
+              <a:effectRef idx="1">
+                <a:schemeClr val="accent1"/>
+              </a:effectRef>
+              <a:fontRef idx="minor">
+                <a:schemeClr val="tx1"/>
+              </a:fontRef>
+            </p:style>
+          </p:cxnSp>
+          <p:cxnSp>
+            <p:nvCxnSpPr>
+              <p:cNvPr id="1080" name="Straight Arrow Connector 1079">
+                <a:extLst>
+                  <a:ext uri="{FF2B5EF4-FFF2-40B4-BE49-F238E27FC236}">
+                    <a16:creationId xmlns:a16="http://schemas.microsoft.com/office/drawing/2014/main" id="{0B7E15EF-23DD-BF40-3676-21292B62089B}"/>
+                  </a:ext>
+                </a:extLst>
+              </p:cNvPr>
+              <p:cNvCxnSpPr>
+                <a:cxnSpLocks/>
+              </p:cNvCxnSpPr>
+              <p:nvPr/>
+            </p:nvCxnSpPr>
+            <p:spPr>
+              <a:xfrm flipV="1">
+                <a:off x="7694545" y="4596999"/>
+                <a:ext cx="0" cy="488831"/>
+              </a:xfrm>
+              <a:prstGeom prst="straightConnector1">
+                <a:avLst/>
+              </a:prstGeom>
+              <a:ln w="38100">
+                <a:headEnd type="triangle"/>
+                <a:tailEnd type="triangle"/>
+              </a:ln>
+            </p:spPr>
+            <p:style>
+              <a:lnRef idx="2">
+                <a:schemeClr val="accent1"/>
+              </a:lnRef>
+              <a:fillRef idx="0">
+                <a:schemeClr val="accent1"/>
+              </a:fillRef>
+              <a:effectRef idx="1">
+                <a:schemeClr val="accent1"/>
+              </a:effectRef>
+              <a:fontRef idx="minor">
+                <a:schemeClr val="tx1"/>
+              </a:fontRef>
+            </p:style>
+          </p:cxnSp>
+          <p:sp>
+            <p:nvSpPr>
+              <p:cNvPr id="1084" name="TextBox 1083">
+                <a:extLst>
+                  <a:ext uri="{FF2B5EF4-FFF2-40B4-BE49-F238E27FC236}">
+                    <a16:creationId xmlns:a16="http://schemas.microsoft.com/office/drawing/2014/main" id="{D01BED6D-0FC1-7191-B4BE-C9524901E489}"/>
+                  </a:ext>
+                </a:extLst>
+              </p:cNvPr>
+              <p:cNvSpPr txBox="1"/>
+              <p:nvPr/>
+            </p:nvSpPr>
+            <p:spPr>
+              <a:xfrm>
+                <a:off x="8603789" y="4747276"/>
+                <a:ext cx="1682216" cy="246221"/>
+              </a:xfrm>
+              <a:prstGeom prst="rect">
+                <a:avLst/>
+              </a:prstGeom>
+              <a:noFill/>
+              <a:ln>
+                <a:solidFill>
+                  <a:schemeClr val="tx1"/>
+                </a:solidFill>
+              </a:ln>
+            </p:spPr>
+            <p:txBody>
+              <a:bodyPr wrap="square" rtlCol="0">
+                <a:spAutoFit/>
+              </a:bodyPr>
+              <a:lstStyle/>
+              <a:p>
+                <a:pPr algn="ctr"/>
+                <a:r>
+                  <a:rPr lang="en-US" sz="1000" dirty="0" err="1"/>
+                  <a:t>find_visits_near_release.R</a:t>
+                </a:r>
+                <a:endParaRPr lang="en-US" sz="1000" dirty="0"/>
+              </a:p>
+            </p:txBody>
+          </p:sp>
+          <p:cxnSp>
+            <p:nvCxnSpPr>
+              <p:cNvPr id="1086" name="Straight Arrow Connector 1085">
+                <a:extLst>
+                  <a:ext uri="{FF2B5EF4-FFF2-40B4-BE49-F238E27FC236}">
+                    <a16:creationId xmlns:a16="http://schemas.microsoft.com/office/drawing/2014/main" id="{B8F73A6B-B9F9-144B-488C-5C18DD4DFA9D}"/>
+                  </a:ext>
+                </a:extLst>
+              </p:cNvPr>
+              <p:cNvCxnSpPr>
+                <a:cxnSpLocks/>
+                <a:stCxn id="1084" idx="0"/>
+                <a:endCxn id="24" idx="3"/>
+              </p:cNvCxnSpPr>
+              <p:nvPr/>
+            </p:nvCxnSpPr>
+            <p:spPr>
+              <a:xfrm flipH="1" flipV="1">
+                <a:off x="9144513" y="4383100"/>
+                <a:ext cx="300384" cy="364176"/>
+              </a:xfrm>
+              <a:prstGeom prst="straightConnector1">
+                <a:avLst/>
+              </a:prstGeom>
+              <a:ln w="38100">
+                <a:headEnd type="triangle"/>
+                <a:tailEnd type="triangle"/>
+              </a:ln>
+            </p:spPr>
+            <p:style>
+              <a:lnRef idx="2">
+                <a:schemeClr val="accent1"/>
+              </a:lnRef>
+              <a:fillRef idx="0">
+                <a:schemeClr val="accent1"/>
+              </a:fillRef>
+              <a:effectRef idx="1">
+                <a:schemeClr val="accent1"/>
+              </a:effectRef>
+              <a:fontRef idx="minor">
+                <a:schemeClr val="tx1"/>
+              </a:fontRef>
+            </p:style>
+          </p:cxnSp>
+          <p:sp>
+            <p:nvSpPr>
+              <p:cNvPr id="1097" name="TextBox 1096">
+                <a:extLst>
+                  <a:ext uri="{FF2B5EF4-FFF2-40B4-BE49-F238E27FC236}">
+                    <a16:creationId xmlns:a16="http://schemas.microsoft.com/office/drawing/2014/main" id="{12CB0752-F8A1-C486-F0E8-AC51EAC4E91C}"/>
+                  </a:ext>
+                </a:extLst>
+              </p:cNvPr>
+              <p:cNvSpPr txBox="1"/>
+              <p:nvPr/>
+            </p:nvSpPr>
+            <p:spPr>
+              <a:xfrm>
+                <a:off x="7694545" y="3078892"/>
+                <a:ext cx="1892851" cy="338554"/>
+              </a:xfrm>
+              <a:prstGeom prst="rect">
+                <a:avLst/>
+              </a:prstGeom>
+              <a:noFill/>
+              <a:ln>
+                <a:solidFill>
+                  <a:schemeClr val="tx1"/>
+                </a:solidFill>
+              </a:ln>
+            </p:spPr>
+            <p:txBody>
+              <a:bodyPr wrap="square" rtlCol="0">
+                <a:spAutoFit/>
+              </a:bodyPr>
+              <a:lstStyle/>
+              <a:p>
+                <a:pPr algn="ctr"/>
+                <a:r>
+                  <a:rPr lang="en-US" sz="1600" dirty="0" err="1"/>
+                  <a:t>passage_boot.R</a:t>
+                </a:r>
+                <a:endParaRPr lang="en-US" sz="1600" dirty="0"/>
+              </a:p>
+            </p:txBody>
+          </p:sp>
+          <p:cxnSp>
+            <p:nvCxnSpPr>
+              <p:cNvPr id="1098" name="Straight Arrow Connector 1097">
+                <a:extLst>
+                  <a:ext uri="{FF2B5EF4-FFF2-40B4-BE49-F238E27FC236}">
+                    <a16:creationId xmlns:a16="http://schemas.microsoft.com/office/drawing/2014/main" id="{4B79FFC2-BA4C-C2BE-CC05-A3897B82E0DC}"/>
+                  </a:ext>
+                </a:extLst>
+              </p:cNvPr>
+              <p:cNvCxnSpPr>
+                <a:cxnSpLocks/>
+              </p:cNvCxnSpPr>
+              <p:nvPr/>
+            </p:nvCxnSpPr>
+            <p:spPr>
+              <a:xfrm flipH="1" flipV="1">
+                <a:off x="6524839" y="2883665"/>
+                <a:ext cx="1128153" cy="353943"/>
+              </a:xfrm>
+              <a:prstGeom prst="straightConnector1">
+                <a:avLst/>
+              </a:prstGeom>
+              <a:ln w="38100">
+                <a:headEnd type="triangle"/>
+                <a:tailEnd type="triangle"/>
+              </a:ln>
+            </p:spPr>
+            <p:style>
+              <a:lnRef idx="2">
+                <a:schemeClr val="accent1"/>
+              </a:lnRef>
+              <a:fillRef idx="0">
+                <a:schemeClr val="accent1"/>
+              </a:fillRef>
+              <a:effectRef idx="1">
+                <a:schemeClr val="accent1"/>
+              </a:effectRef>
+              <a:fontRef idx="minor">
+                <a:schemeClr val="tx1"/>
+              </a:fontRef>
+            </p:style>
+          </p:cxnSp>
+          <p:sp>
+            <p:nvSpPr>
+              <p:cNvPr id="1103" name="TextBox 1102">
+                <a:extLst>
+                  <a:ext uri="{FF2B5EF4-FFF2-40B4-BE49-F238E27FC236}">
+                    <a16:creationId xmlns:a16="http://schemas.microsoft.com/office/drawing/2014/main" id="{53AC842C-A473-DCE0-3329-23F7D98717D1}"/>
+                  </a:ext>
+                </a:extLst>
+              </p:cNvPr>
+              <p:cNvSpPr txBox="1"/>
+              <p:nvPr/>
+            </p:nvSpPr>
+            <p:spPr>
+              <a:xfrm>
+                <a:off x="7897369" y="1545380"/>
+                <a:ext cx="1892851" cy="1323439"/>
+              </a:xfrm>
+              <a:prstGeom prst="rect">
+                <a:avLst/>
+              </a:prstGeom>
+              <a:solidFill>
+                <a:schemeClr val="accent2">
+                  <a:lumMod val="40000"/>
+                  <a:lumOff val="60000"/>
+                </a:schemeClr>
+              </a:solidFill>
+              <a:ln>
+                <a:solidFill>
+                  <a:schemeClr val="tx1"/>
+                </a:solidFill>
+              </a:ln>
+            </p:spPr>
+            <p:txBody>
+              <a:bodyPr wrap="square" rtlCol="0">
+                <a:spAutoFit/>
+              </a:bodyPr>
+              <a:lstStyle/>
+              <a:p>
+                <a:r>
+                  <a:rPr lang="en-US" sz="1600" b="1" u="sng" dirty="0"/>
+                  <a:t>Outputs</a:t>
+                </a:r>
+              </a:p>
+              <a:p>
+                <a:r>
+                  <a:rPr lang="en-US" sz="1600" dirty="0" err="1"/>
+                  <a:t>passage_estimates</a:t>
+                </a:r>
+                <a:endParaRPr lang="en-US" sz="1600" dirty="0"/>
+              </a:p>
+              <a:p>
+                <a:r>
+                  <a:rPr lang="en-US" sz="1600" dirty="0" err="1"/>
+                  <a:t>efficiency_results</a:t>
+                </a:r>
+                <a:endParaRPr lang="en-US" sz="1600" dirty="0"/>
+              </a:p>
+              <a:p>
+                <a:r>
+                  <a:rPr lang="en-US" sz="1600" dirty="0" err="1"/>
+                  <a:t>catch_results</a:t>
+                </a:r>
+                <a:endParaRPr lang="en-US" sz="1600" dirty="0"/>
+              </a:p>
+              <a:p>
+                <a:r>
+                  <a:rPr lang="en-US" sz="1600" dirty="0"/>
+                  <a:t>summary plots</a:t>
+                </a:r>
+              </a:p>
+            </p:txBody>
+          </p:sp>
+          <p:cxnSp>
+            <p:nvCxnSpPr>
+              <p:cNvPr id="1106" name="Straight Arrow Connector 1105">
+                <a:extLst>
+                  <a:ext uri="{FF2B5EF4-FFF2-40B4-BE49-F238E27FC236}">
+                    <a16:creationId xmlns:a16="http://schemas.microsoft.com/office/drawing/2014/main" id="{AFF0A3B8-EBD8-FEF9-5188-91DC1BF91691}"/>
+                  </a:ext>
+                </a:extLst>
+              </p:cNvPr>
+              <p:cNvCxnSpPr>
+                <a:cxnSpLocks/>
+              </p:cNvCxnSpPr>
+              <p:nvPr/>
+            </p:nvCxnSpPr>
+            <p:spPr>
+              <a:xfrm>
+                <a:off x="6555877" y="2330560"/>
+                <a:ext cx="1201538" cy="0"/>
+              </a:xfrm>
+              <a:prstGeom prst="straightConnector1">
+                <a:avLst/>
+              </a:prstGeom>
+              <a:ln w="76200">
+                <a:tailEnd type="triangle"/>
+              </a:ln>
+            </p:spPr>
+            <p:style>
+              <a:lnRef idx="2">
+                <a:schemeClr val="accent1"/>
+              </a:lnRef>
+              <a:fillRef idx="0">
+                <a:schemeClr val="accent1"/>
+              </a:fillRef>
+              <a:effectRef idx="1">
+                <a:schemeClr val="accent1"/>
+              </a:effectRef>
+              <a:fontRef idx="minor">
+                <a:schemeClr val="tx1"/>
+              </a:fontRef>
+            </p:style>
+          </p:cxnSp>
+          <p:sp>
+            <p:nvSpPr>
+              <p:cNvPr id="12" name="TextBox 11">
+                <a:extLst>
+                  <a:ext uri="{FF2B5EF4-FFF2-40B4-BE49-F238E27FC236}">
+                    <a16:creationId xmlns:a16="http://schemas.microsoft.com/office/drawing/2014/main" id="{FCD32D64-CD6D-F599-9041-7FDB1E87E952}"/>
+                  </a:ext>
+                </a:extLst>
+              </p:cNvPr>
+              <p:cNvSpPr txBox="1"/>
+              <p:nvPr/>
+            </p:nvSpPr>
+            <p:spPr>
+              <a:xfrm>
+                <a:off x="9985621" y="5640765"/>
+                <a:ext cx="2031879" cy="338554"/>
+              </a:xfrm>
+              <a:prstGeom prst="rect">
+                <a:avLst/>
+              </a:prstGeom>
+              <a:noFill/>
+              <a:ln>
+                <a:solidFill>
+                  <a:schemeClr val="tx1"/>
+                </a:solidFill>
+              </a:ln>
+            </p:spPr>
+            <p:txBody>
+              <a:bodyPr wrap="square" rtlCol="0">
+                <a:spAutoFit/>
+              </a:bodyPr>
+              <a:lstStyle/>
+              <a:p>
+                <a:pPr algn="ctr"/>
+                <a:r>
+                  <a:rPr lang="en-US" sz="1600" dirty="0" err="1"/>
+                  <a:t>summarize_index.R</a:t>
+                </a:r>
+                <a:endParaRPr lang="en-US" sz="1600" dirty="0"/>
+              </a:p>
+            </p:txBody>
+          </p:sp>
+          <p:sp>
+            <p:nvSpPr>
+              <p:cNvPr id="13" name="TextBox 12">
+                <a:extLst>
+                  <a:ext uri="{FF2B5EF4-FFF2-40B4-BE49-F238E27FC236}">
+                    <a16:creationId xmlns:a16="http://schemas.microsoft.com/office/drawing/2014/main" id="{1DD3D82D-363B-050B-0FD5-607FF739383A}"/>
+                  </a:ext>
+                </a:extLst>
+              </p:cNvPr>
+              <p:cNvSpPr txBox="1"/>
+              <p:nvPr/>
+            </p:nvSpPr>
+            <p:spPr>
+              <a:xfrm>
+                <a:off x="9790219" y="3962191"/>
+                <a:ext cx="2227281" cy="338554"/>
+              </a:xfrm>
+              <a:prstGeom prst="rect">
+                <a:avLst/>
+              </a:prstGeom>
+              <a:noFill/>
+              <a:ln>
+                <a:solidFill>
+                  <a:schemeClr val="tx1"/>
+                </a:solidFill>
+              </a:ln>
+            </p:spPr>
+            <p:txBody>
+              <a:bodyPr wrap="square" rtlCol="0">
+                <a:spAutoFit/>
+              </a:bodyPr>
+              <a:lstStyle/>
+              <a:p>
+                <a:pPr algn="ctr"/>
+                <a:r>
+                  <a:rPr lang="en-US" sz="1600" dirty="0" err="1"/>
+                  <a:t>summarize_passage.R</a:t>
+                </a:r>
+                <a:endParaRPr lang="en-US" sz="1600" dirty="0"/>
+              </a:p>
+            </p:txBody>
+          </p:sp>
+          <p:cxnSp>
+            <p:nvCxnSpPr>
+              <p:cNvPr id="16" name="Straight Arrow Connector 15">
+                <a:extLst>
+                  <a:ext uri="{FF2B5EF4-FFF2-40B4-BE49-F238E27FC236}">
+                    <a16:creationId xmlns:a16="http://schemas.microsoft.com/office/drawing/2014/main" id="{F53F0ECB-AC8B-D233-D372-0D077E3D595C}"/>
+                  </a:ext>
+                </a:extLst>
+              </p:cNvPr>
+              <p:cNvCxnSpPr>
+                <a:cxnSpLocks/>
+              </p:cNvCxnSpPr>
+              <p:nvPr/>
+            </p:nvCxnSpPr>
+            <p:spPr>
+              <a:xfrm>
+                <a:off x="10942938" y="4412333"/>
+                <a:ext cx="0" cy="1177360"/>
+              </a:xfrm>
+              <a:prstGeom prst="straightConnector1">
+                <a:avLst/>
+              </a:prstGeom>
+              <a:ln w="38100">
+                <a:headEnd type="triangle"/>
+                <a:tailEnd type="triangle"/>
+              </a:ln>
+            </p:spPr>
+            <p:style>
+              <a:lnRef idx="2">
+                <a:schemeClr val="accent1"/>
+              </a:lnRef>
+              <a:fillRef idx="0">
+                <a:schemeClr val="accent1"/>
+              </a:fillRef>
+              <a:effectRef idx="1">
+                <a:schemeClr val="accent1"/>
+              </a:effectRef>
+              <a:fontRef idx="minor">
+                <a:schemeClr val="tx1"/>
+              </a:fontRef>
+            </p:style>
+          </p:cxnSp>
+          <p:cxnSp>
+            <p:nvCxnSpPr>
+              <p:cNvPr id="18" name="Straight Arrow Connector 17">
+                <a:extLst>
+                  <a:ext uri="{FF2B5EF4-FFF2-40B4-BE49-F238E27FC236}">
+                    <a16:creationId xmlns:a16="http://schemas.microsoft.com/office/drawing/2014/main" id="{E436D742-784D-2274-AA0E-C97173FE74AA}"/>
+                  </a:ext>
+                </a:extLst>
+              </p:cNvPr>
+              <p:cNvCxnSpPr>
+                <a:cxnSpLocks/>
+                <a:endCxn id="1097" idx="3"/>
+              </p:cNvCxnSpPr>
+              <p:nvPr/>
+            </p:nvCxnSpPr>
+            <p:spPr>
+              <a:xfrm flipH="1" flipV="1">
+                <a:off x="9587396" y="3248169"/>
+                <a:ext cx="1116890" cy="664915"/>
+              </a:xfrm>
+              <a:prstGeom prst="straightConnector1">
+                <a:avLst/>
+              </a:prstGeom>
+              <a:ln w="38100">
+                <a:headEnd type="triangle"/>
+                <a:tailEnd type="triangle"/>
+              </a:ln>
+            </p:spPr>
+            <p:style>
+              <a:lnRef idx="2">
+                <a:schemeClr val="accent1"/>
+              </a:lnRef>
+              <a:fillRef idx="0">
+                <a:schemeClr val="accent1"/>
+              </a:fillRef>
+              <a:effectRef idx="1">
+                <a:schemeClr val="accent1"/>
+              </a:effectRef>
+              <a:fontRef idx="minor">
+                <a:schemeClr val="tx1"/>
+              </a:fontRef>
+            </p:style>
+          </p:cxnSp>
         </p:grpSp>
       </p:grpSp>
-      <p:sp>
-        <p:nvSpPr>
-          <p:cNvPr id="9" name="TextBox 8">
-            <a:extLst>
-              <a:ext uri="{FF2B5EF4-FFF2-40B4-BE49-F238E27FC236}">
-                <a16:creationId xmlns:a16="http://schemas.microsoft.com/office/drawing/2014/main" id="{28F64EF9-07A5-7B0F-7CB8-AE4ABE98B892}"/>
-              </a:ext>
-            </a:extLst>
-          </p:cNvPr>
-          <p:cNvSpPr txBox="1"/>
+    </p:spTree>
+    <p:extLst>
+      <p:ext uri="{BB962C8B-B14F-4D97-AF65-F5344CB8AC3E}">
+        <p14:creationId xmlns:p14="http://schemas.microsoft.com/office/powerpoint/2010/main" val="291410532"/>
+      </p:ext>
+    </p:extLst>
+  </p:cSld>
+  <p:clrMapOvr>
+    <a:masterClrMapping/>
+  </p:clrMapOvr>
+</p:sld>
+</file>
+
+<file path=ppt/slides/slide10.xml><?xml version="1.0" encoding="utf-8"?>
+<p:sld xmlns:a="http://schemas.openxmlformats.org/drawingml/2006/main" xmlns:r="http://schemas.openxmlformats.org/officeDocument/2006/relationships" xmlns:p="http://schemas.openxmlformats.org/presentationml/2006/main">
+  <p:cSld>
+    <p:spTree>
+      <p:nvGrpSpPr>
+        <p:cNvPr id="1" name=""/>
+        <p:cNvGrpSpPr/>
+        <p:nvPr/>
+      </p:nvGrpSpPr>
+      <p:grpSpPr>
+        <a:xfrm>
+          <a:off x="0" y="0"/>
+          <a:ext cx="0" cy="0"/>
+          <a:chOff x="0" y="0"/>
+          <a:chExt cx="0" cy="0"/>
+        </a:xfrm>
+      </p:grpSpPr>
+      <p:pic>
+        <p:nvPicPr>
+          <p:cNvPr id="5" name="Picture 4">
+            <a:extLst>
+              <a:ext uri="{FF2B5EF4-FFF2-40B4-BE49-F238E27FC236}">
+                <a16:creationId xmlns:a16="http://schemas.microsoft.com/office/drawing/2014/main" id="{DD32BB87-ED6F-97FE-9260-537785B4256A}"/>
+              </a:ext>
+            </a:extLst>
+          </p:cNvPr>
+          <p:cNvPicPr>
+            <a:picLocks noChangeAspect="1"/>
+          </p:cNvPicPr>
           <p:nvPr/>
-        </p:nvSpPr>
+        </p:nvPicPr>
+        <p:blipFill>
+          <a:blip r:embed="rId2"/>
+          <a:stretch>
+            <a:fillRect/>
+          </a:stretch>
+        </p:blipFill>
         <p:spPr>
           <a:xfrm>
-            <a:off x="865574" y="1452829"/>
-            <a:ext cx="1731078" cy="1077218"/>
+            <a:off x="61070" y="390101"/>
+            <a:ext cx="12069859" cy="6077798"/>
           </a:xfrm>
           <a:prstGeom prst="rect">
             <a:avLst/>
           </a:prstGeom>
-          <a:solidFill>
-            <a:schemeClr val="accent6">
-              <a:lumMod val="40000"/>
-              <a:lumOff val="60000"/>
-            </a:schemeClr>
-          </a:solidFill>
           <a:ln>
             <a:solidFill>
               <a:schemeClr val="tx1"/>
             </a:solidFill>
           </a:ln>
         </p:spPr>
-        <p:txBody>
-          <a:bodyPr wrap="square" rtlCol="0">
-            <a:spAutoFit/>
-          </a:bodyPr>
-          <a:lstStyle/>
-          <a:p>
-            <a:r>
-              <a:rPr lang="en-US" sz="1600" dirty="0" err="1"/>
-              <a:t>catch_data</a:t>
-            </a:r>
-            <a:endParaRPr lang="en-US" sz="1600" dirty="0"/>
-          </a:p>
-          <a:p>
-            <a:r>
-              <a:rPr lang="en-US" sz="1600" dirty="0" err="1"/>
-              <a:t>visit_data</a:t>
-            </a:r>
-            <a:endParaRPr lang="en-US" sz="1600" dirty="0"/>
-          </a:p>
-          <a:p>
-            <a:r>
-              <a:rPr lang="en-US" sz="1600" dirty="0" err="1"/>
-              <a:t>release_data</a:t>
-            </a:r>
-            <a:endParaRPr lang="en-US" sz="1600" dirty="0"/>
-          </a:p>
-          <a:p>
-            <a:r>
-              <a:rPr lang="en-US" sz="1600" dirty="0" err="1"/>
-              <a:t>recapture_data</a:t>
-            </a:r>
-            <a:endParaRPr lang="en-US" sz="1600" dirty="0"/>
-          </a:p>
-        </p:txBody>
-      </p:sp>
-      <p:cxnSp>
-        <p:nvCxnSpPr>
-          <p:cNvPr id="11" name="Straight Arrow Connector 10">
-            <a:extLst>
-              <a:ext uri="{FF2B5EF4-FFF2-40B4-BE49-F238E27FC236}">
-                <a16:creationId xmlns:a16="http://schemas.microsoft.com/office/drawing/2014/main" id="{E2D8E6E7-479F-FE34-B14F-53FE5637BCEA}"/>
-              </a:ext>
-            </a:extLst>
-          </p:cNvPr>
-          <p:cNvCxnSpPr>
-            <a:cxnSpLocks/>
-          </p:cNvCxnSpPr>
+      </p:pic>
+    </p:spTree>
+    <p:extLst>
+      <p:ext uri="{BB962C8B-B14F-4D97-AF65-F5344CB8AC3E}">
+        <p14:creationId xmlns:p14="http://schemas.microsoft.com/office/powerpoint/2010/main" val="3165026171"/>
+      </p:ext>
+    </p:extLst>
+  </p:cSld>
+  <p:clrMapOvr>
+    <a:masterClrMapping/>
+  </p:clrMapOvr>
+</p:sld>
+</file>
+
+<file path=ppt/slides/slide11.xml><?xml version="1.0" encoding="utf-8"?>
+<p:sld xmlns:a="http://schemas.openxmlformats.org/drawingml/2006/main" xmlns:r="http://schemas.openxmlformats.org/officeDocument/2006/relationships" xmlns:p="http://schemas.openxmlformats.org/presentationml/2006/main">
+  <p:cSld>
+    <p:spTree>
+      <p:nvGrpSpPr>
+        <p:cNvPr id="1" name=""/>
+        <p:cNvGrpSpPr/>
+        <p:nvPr/>
+      </p:nvGrpSpPr>
+      <p:grpSpPr>
+        <a:xfrm>
+          <a:off x="0" y="0"/>
+          <a:ext cx="0" cy="0"/>
+          <a:chOff x="0" y="0"/>
+          <a:chExt cx="0" cy="0"/>
+        </a:xfrm>
+      </p:grpSpPr>
+      <p:pic>
+        <p:nvPicPr>
+          <p:cNvPr id="5" name="Picture 4">
+            <a:extLst>
+              <a:ext uri="{FF2B5EF4-FFF2-40B4-BE49-F238E27FC236}">
+                <a16:creationId xmlns:a16="http://schemas.microsoft.com/office/drawing/2014/main" id="{0B086466-996E-6A9A-75F1-80EA195267CC}"/>
+              </a:ext>
+            </a:extLst>
+          </p:cNvPr>
+          <p:cNvPicPr>
+            <a:picLocks noChangeAspect="1"/>
+          </p:cNvPicPr>
           <p:nvPr/>
-        </p:nvCxnSpPr>
+        </p:nvPicPr>
+        <p:blipFill>
+          <a:blip r:embed="rId2"/>
+          <a:stretch>
+            <a:fillRect/>
+          </a:stretch>
+        </p:blipFill>
         <p:spPr>
           <a:xfrm>
-            <a:off x="2657245" y="1996506"/>
-            <a:ext cx="2226931" cy="438410"/>
-          </a:xfrm>
-          <a:prstGeom prst="straightConnector1">
-            <a:avLst/>
-          </a:prstGeom>
-          <a:ln w="76200">
-            <a:tailEnd type="triangle"/>
-          </a:ln>
-        </p:spPr>
-        <p:style>
-          <a:lnRef idx="2">
-            <a:schemeClr val="accent1"/>
-          </a:lnRef>
-          <a:fillRef idx="0">
-            <a:schemeClr val="accent1"/>
-          </a:fillRef>
-          <a:effectRef idx="1">
-            <a:schemeClr val="accent1"/>
-          </a:effectRef>
-          <a:fontRef idx="minor">
-            <a:schemeClr val="tx1"/>
-          </a:fontRef>
-        </p:style>
-      </p:cxnSp>
-      <p:sp>
-        <p:nvSpPr>
-          <p:cNvPr id="15" name="TextBox 14">
-            <a:extLst>
-              <a:ext uri="{FF2B5EF4-FFF2-40B4-BE49-F238E27FC236}">
-                <a16:creationId xmlns:a16="http://schemas.microsoft.com/office/drawing/2014/main" id="{154CC95C-BB11-AE31-622B-74A6623D944A}"/>
-              </a:ext>
-            </a:extLst>
-          </p:cNvPr>
-          <p:cNvSpPr txBox="1"/>
-          <p:nvPr/>
-        </p:nvSpPr>
-        <p:spPr>
-          <a:xfrm>
-            <a:off x="2943749" y="4227667"/>
-            <a:ext cx="1408278" cy="369332"/>
+            <a:off x="113465" y="556811"/>
+            <a:ext cx="11965070" cy="5744377"/>
           </a:xfrm>
           <a:prstGeom prst="rect">
             <a:avLst/>
           </a:prstGeom>
-          <a:noFill/>
           <a:ln>
             <a:solidFill>
               <a:schemeClr val="tx1"/>
             </a:solidFill>
           </a:ln>
         </p:spPr>
-        <p:txBody>
-          <a:bodyPr wrap="square" rtlCol="0">
-            <a:spAutoFit/>
-          </a:bodyPr>
-          <a:lstStyle/>
-          <a:p>
-            <a:pPr algn="ctr"/>
-            <a:r>
-              <a:rPr lang="en-US" dirty="0" err="1"/>
-              <a:t>est_catch.R</a:t>
-            </a:r>
-            <a:endParaRPr lang="en-US" dirty="0"/>
-          </a:p>
-        </p:txBody>
-      </p:sp>
-      <p:sp>
-        <p:nvSpPr>
-          <p:cNvPr id="24" name="TextBox 23">
-            <a:extLst>
-              <a:ext uri="{FF2B5EF4-FFF2-40B4-BE49-F238E27FC236}">
-                <a16:creationId xmlns:a16="http://schemas.microsoft.com/office/drawing/2014/main" id="{38A56400-E96D-A5B7-9A2F-CB0347AD6A34}"/>
-              </a:ext>
-            </a:extLst>
-          </p:cNvPr>
-          <p:cNvSpPr txBox="1"/>
-          <p:nvPr/>
-        </p:nvSpPr>
-        <p:spPr>
-          <a:xfrm>
-            <a:off x="7555949" y="4213823"/>
-            <a:ext cx="1588564" cy="338554"/>
-          </a:xfrm>
-          <a:prstGeom prst="rect">
-            <a:avLst/>
-          </a:prstGeom>
-          <a:noFill/>
-          <a:ln>
-            <a:solidFill>
-              <a:schemeClr val="tx1"/>
-            </a:solidFill>
-          </a:ln>
-        </p:spPr>
-        <p:txBody>
-          <a:bodyPr wrap="square" rtlCol="0">
-            <a:spAutoFit/>
-          </a:bodyPr>
-          <a:lstStyle/>
-          <a:p>
-            <a:pPr algn="ctr"/>
-            <a:r>
-              <a:rPr lang="en-US" sz="1600" dirty="0" err="1"/>
-              <a:t>est_efficiency.R</a:t>
-            </a:r>
-            <a:endParaRPr lang="en-US" sz="1600" dirty="0"/>
-          </a:p>
-        </p:txBody>
-      </p:sp>
-      <p:sp>
-        <p:nvSpPr>
-          <p:cNvPr id="30" name="TextBox 29">
-            <a:extLst>
-              <a:ext uri="{FF2B5EF4-FFF2-40B4-BE49-F238E27FC236}">
-                <a16:creationId xmlns:a16="http://schemas.microsoft.com/office/drawing/2014/main" id="{DEEA24D1-B2C4-ECEF-247D-D1E3C3B0FD1D}"/>
-              </a:ext>
-            </a:extLst>
-          </p:cNvPr>
-          <p:cNvSpPr txBox="1"/>
-          <p:nvPr/>
-        </p:nvSpPr>
-        <p:spPr>
-          <a:xfrm>
-            <a:off x="849262" y="2638752"/>
-            <a:ext cx="1731078" cy="1323439"/>
-          </a:xfrm>
-          <a:prstGeom prst="rect">
-            <a:avLst/>
-          </a:prstGeom>
-          <a:solidFill>
-            <a:schemeClr val="tx2">
-              <a:lumMod val="10000"/>
-              <a:lumOff val="90000"/>
-            </a:schemeClr>
-          </a:solidFill>
-          <a:ln>
-            <a:solidFill>
-              <a:schemeClr val="tx1"/>
-            </a:solidFill>
-          </a:ln>
-        </p:spPr>
-        <p:txBody>
-          <a:bodyPr wrap="square" rtlCol="0">
-            <a:spAutoFit/>
-          </a:bodyPr>
-          <a:lstStyle/>
-          <a:p>
-            <a:r>
-              <a:rPr lang="en-US" sz="1600" dirty="0"/>
-              <a:t>summarize.by</a:t>
-            </a:r>
-          </a:p>
-          <a:p>
-            <a:r>
-              <a:rPr lang="en-US" sz="1600" dirty="0"/>
-              <a:t>bootstrap</a:t>
-            </a:r>
-          </a:p>
-          <a:p>
-            <a:r>
-              <a:rPr lang="en-US" sz="1600" dirty="0" err="1"/>
-              <a:t>impute_all</a:t>
-            </a:r>
-            <a:endParaRPr lang="en-US" sz="1600" dirty="0"/>
-          </a:p>
-          <a:p>
-            <a:r>
-              <a:rPr lang="en-US" sz="1600" dirty="0" err="1"/>
-              <a:t>survey_start</a:t>
-            </a:r>
-            <a:endParaRPr lang="en-US" sz="1600" dirty="0"/>
-          </a:p>
-          <a:p>
-            <a:r>
-              <a:rPr lang="en-US" sz="1600" dirty="0" err="1"/>
-              <a:t>survey_end</a:t>
-            </a:r>
-            <a:endParaRPr lang="en-US" sz="1600" dirty="0"/>
-          </a:p>
-        </p:txBody>
-      </p:sp>
-      <p:cxnSp>
-        <p:nvCxnSpPr>
-          <p:cNvPr id="31" name="Straight Arrow Connector 30">
-            <a:extLst>
-              <a:ext uri="{FF2B5EF4-FFF2-40B4-BE49-F238E27FC236}">
-                <a16:creationId xmlns:a16="http://schemas.microsoft.com/office/drawing/2014/main" id="{A1FF2BE4-9407-51CD-9B0D-0B8883DB2B44}"/>
-              </a:ext>
-            </a:extLst>
-          </p:cNvPr>
-          <p:cNvCxnSpPr>
-            <a:cxnSpLocks/>
-          </p:cNvCxnSpPr>
-          <p:nvPr/>
-        </p:nvCxnSpPr>
-        <p:spPr>
-          <a:xfrm flipV="1">
-            <a:off x="2572400" y="2750675"/>
-            <a:ext cx="2262381" cy="566495"/>
-          </a:xfrm>
-          <a:prstGeom prst="straightConnector1">
-            <a:avLst/>
-          </a:prstGeom>
-          <a:ln w="76200">
-            <a:tailEnd type="triangle"/>
-          </a:ln>
-        </p:spPr>
-        <p:style>
-          <a:lnRef idx="2">
-            <a:schemeClr val="accent1"/>
-          </a:lnRef>
-          <a:fillRef idx="0">
-            <a:schemeClr val="accent1"/>
-          </a:fillRef>
-          <a:effectRef idx="1">
-            <a:schemeClr val="accent1"/>
-          </a:effectRef>
-          <a:fontRef idx="minor">
-            <a:schemeClr val="tx1"/>
-          </a:fontRef>
-        </p:style>
-      </p:cxnSp>
-      <p:cxnSp>
-        <p:nvCxnSpPr>
-          <p:cNvPr id="63" name="Straight Arrow Connector 62">
-            <a:extLst>
-              <a:ext uri="{FF2B5EF4-FFF2-40B4-BE49-F238E27FC236}">
-                <a16:creationId xmlns:a16="http://schemas.microsoft.com/office/drawing/2014/main" id="{7A31B61B-730C-567F-A193-23F44D3325B4}"/>
-              </a:ext>
-            </a:extLst>
-          </p:cNvPr>
-          <p:cNvCxnSpPr>
-            <a:cxnSpLocks/>
-          </p:cNvCxnSpPr>
-          <p:nvPr/>
-        </p:nvCxnSpPr>
-        <p:spPr>
-          <a:xfrm flipH="1">
-            <a:off x="4236043" y="3203809"/>
-            <a:ext cx="867043" cy="945346"/>
-          </a:xfrm>
-          <a:prstGeom prst="straightConnector1">
-            <a:avLst/>
-          </a:prstGeom>
-          <a:ln w="38100">
-            <a:headEnd type="triangle"/>
-            <a:tailEnd type="triangle"/>
-          </a:ln>
-        </p:spPr>
-        <p:style>
-          <a:lnRef idx="2">
-            <a:schemeClr val="accent1"/>
-          </a:lnRef>
-          <a:fillRef idx="0">
-            <a:schemeClr val="accent1"/>
-          </a:fillRef>
-          <a:effectRef idx="1">
-            <a:schemeClr val="accent1"/>
-          </a:effectRef>
-          <a:fontRef idx="minor">
-            <a:schemeClr val="tx1"/>
-          </a:fontRef>
-        </p:style>
-      </p:cxnSp>
-      <p:sp>
-        <p:nvSpPr>
-          <p:cNvPr id="1031" name="TextBox 1030">
-            <a:extLst>
-              <a:ext uri="{FF2B5EF4-FFF2-40B4-BE49-F238E27FC236}">
-                <a16:creationId xmlns:a16="http://schemas.microsoft.com/office/drawing/2014/main" id="{DC0FB80F-440C-57BF-55C8-97C043471AA2}"/>
-              </a:ext>
-            </a:extLst>
-          </p:cNvPr>
-          <p:cNvSpPr txBox="1"/>
-          <p:nvPr/>
-        </p:nvSpPr>
-        <p:spPr>
-          <a:xfrm>
-            <a:off x="5103086" y="4161278"/>
-            <a:ext cx="1682216" cy="507831"/>
-          </a:xfrm>
-          <a:prstGeom prst="rect">
-            <a:avLst/>
-          </a:prstGeom>
-          <a:noFill/>
-          <a:ln>
-            <a:solidFill>
-              <a:schemeClr val="tx1"/>
-            </a:solidFill>
-          </a:ln>
-        </p:spPr>
-        <p:txBody>
-          <a:bodyPr wrap="square" rtlCol="0">
-            <a:spAutoFit/>
-          </a:bodyPr>
-          <a:lstStyle/>
-          <a:p>
-            <a:r>
-              <a:rPr lang="en-US" sz="900" dirty="0" err="1"/>
-              <a:t>calculate_sampling_time.R</a:t>
-            </a:r>
-            <a:endParaRPr lang="en-US" sz="900" dirty="0"/>
-          </a:p>
-          <a:p>
-            <a:r>
-              <a:rPr lang="en-US" sz="900" dirty="0" err="1"/>
-              <a:t>fix_dates.R</a:t>
-            </a:r>
-            <a:endParaRPr lang="en-US" sz="900" dirty="0"/>
-          </a:p>
-          <a:p>
-            <a:r>
-              <a:rPr lang="en-US" sz="900" dirty="0" err="1"/>
-              <a:t>assign_batch_date.R</a:t>
-            </a:r>
-            <a:endParaRPr lang="en-US" sz="900" dirty="0"/>
-          </a:p>
-        </p:txBody>
-      </p:sp>
-      <p:cxnSp>
-        <p:nvCxnSpPr>
-          <p:cNvPr id="1050" name="Straight Arrow Connector 1049">
-            <a:extLst>
-              <a:ext uri="{FF2B5EF4-FFF2-40B4-BE49-F238E27FC236}">
-                <a16:creationId xmlns:a16="http://schemas.microsoft.com/office/drawing/2014/main" id="{F6B15FE2-1A22-4B89-431F-05A455CD8EC9}"/>
-              </a:ext>
-            </a:extLst>
-          </p:cNvPr>
-          <p:cNvCxnSpPr>
-            <a:cxnSpLocks/>
-          </p:cNvCxnSpPr>
-          <p:nvPr/>
-        </p:nvCxnSpPr>
-        <p:spPr>
-          <a:xfrm>
-            <a:off x="6393712" y="3243670"/>
-            <a:ext cx="1157999" cy="850847"/>
-          </a:xfrm>
-          <a:prstGeom prst="straightConnector1">
-            <a:avLst/>
-          </a:prstGeom>
-          <a:ln w="38100">
-            <a:headEnd type="triangle"/>
-            <a:tailEnd type="triangle"/>
-          </a:ln>
-        </p:spPr>
-        <p:style>
-          <a:lnRef idx="2">
-            <a:schemeClr val="accent1"/>
-          </a:lnRef>
-          <a:fillRef idx="0">
-            <a:schemeClr val="accent1"/>
-          </a:fillRef>
-          <a:effectRef idx="1">
-            <a:schemeClr val="accent1"/>
-          </a:effectRef>
-          <a:fontRef idx="minor">
-            <a:schemeClr val="tx1"/>
-          </a:fontRef>
-        </p:style>
-      </p:cxnSp>
-      <p:cxnSp>
-        <p:nvCxnSpPr>
-          <p:cNvPr id="1055" name="Straight Arrow Connector 1054">
-            <a:extLst>
-              <a:ext uri="{FF2B5EF4-FFF2-40B4-BE49-F238E27FC236}">
-                <a16:creationId xmlns:a16="http://schemas.microsoft.com/office/drawing/2014/main" id="{A524965F-0CC9-C8F9-C056-43F46E6EC10C}"/>
-              </a:ext>
-            </a:extLst>
-          </p:cNvPr>
-          <p:cNvCxnSpPr>
-            <a:cxnSpLocks/>
-          </p:cNvCxnSpPr>
-          <p:nvPr/>
-        </p:nvCxnSpPr>
-        <p:spPr>
-          <a:xfrm flipH="1">
-            <a:off x="4393716" y="4231185"/>
-            <a:ext cx="663443" cy="485"/>
-          </a:xfrm>
-          <a:prstGeom prst="straightConnector1">
-            <a:avLst/>
-          </a:prstGeom>
-          <a:ln w="38100">
-            <a:headEnd type="triangle"/>
-            <a:tailEnd type="triangle"/>
-          </a:ln>
-        </p:spPr>
-        <p:style>
-          <a:lnRef idx="2">
-            <a:schemeClr val="accent1"/>
-          </a:lnRef>
-          <a:fillRef idx="0">
-            <a:schemeClr val="accent1"/>
-          </a:fillRef>
-          <a:effectRef idx="1">
-            <a:schemeClr val="accent1"/>
-          </a:effectRef>
-          <a:fontRef idx="minor">
-            <a:schemeClr val="tx1"/>
-          </a:fontRef>
-        </p:style>
-      </p:cxnSp>
-      <p:cxnSp>
-        <p:nvCxnSpPr>
-          <p:cNvPr id="1060" name="Straight Arrow Connector 1059">
-            <a:extLst>
-              <a:ext uri="{FF2B5EF4-FFF2-40B4-BE49-F238E27FC236}">
-                <a16:creationId xmlns:a16="http://schemas.microsoft.com/office/drawing/2014/main" id="{6540CC88-DE68-A83C-90A0-DB163BD2B8AD}"/>
-              </a:ext>
-            </a:extLst>
-          </p:cNvPr>
-          <p:cNvCxnSpPr>
-            <a:cxnSpLocks/>
-          </p:cNvCxnSpPr>
-          <p:nvPr/>
-        </p:nvCxnSpPr>
-        <p:spPr>
-          <a:xfrm flipH="1">
-            <a:off x="4397954" y="4383585"/>
-            <a:ext cx="663443" cy="485"/>
-          </a:xfrm>
-          <a:prstGeom prst="straightConnector1">
-            <a:avLst/>
-          </a:prstGeom>
-          <a:ln w="38100">
-            <a:headEnd type="triangle"/>
-            <a:tailEnd type="triangle"/>
-          </a:ln>
-        </p:spPr>
-        <p:style>
-          <a:lnRef idx="2">
-            <a:schemeClr val="accent1"/>
-          </a:lnRef>
-          <a:fillRef idx="0">
-            <a:schemeClr val="accent1"/>
-          </a:fillRef>
-          <a:effectRef idx="1">
-            <a:schemeClr val="accent1"/>
-          </a:effectRef>
-          <a:fontRef idx="minor">
-            <a:schemeClr val="tx1"/>
-          </a:fontRef>
-        </p:style>
-      </p:cxnSp>
-      <p:cxnSp>
-        <p:nvCxnSpPr>
-          <p:cNvPr id="1061" name="Straight Arrow Connector 1060">
-            <a:extLst>
-              <a:ext uri="{FF2B5EF4-FFF2-40B4-BE49-F238E27FC236}">
-                <a16:creationId xmlns:a16="http://schemas.microsoft.com/office/drawing/2014/main" id="{4520C1DE-9396-4909-DE37-F4054360DE59}"/>
-              </a:ext>
-            </a:extLst>
-          </p:cNvPr>
-          <p:cNvCxnSpPr>
-            <a:cxnSpLocks/>
-          </p:cNvCxnSpPr>
-          <p:nvPr/>
-        </p:nvCxnSpPr>
-        <p:spPr>
-          <a:xfrm flipH="1">
-            <a:off x="4395927" y="4550232"/>
-            <a:ext cx="663443" cy="485"/>
-          </a:xfrm>
-          <a:prstGeom prst="straightConnector1">
-            <a:avLst/>
-          </a:prstGeom>
-          <a:ln w="38100">
-            <a:headEnd type="triangle"/>
-            <a:tailEnd type="triangle"/>
-          </a:ln>
-        </p:spPr>
-        <p:style>
-          <a:lnRef idx="2">
-            <a:schemeClr val="accent1"/>
-          </a:lnRef>
-          <a:fillRef idx="0">
-            <a:schemeClr val="accent1"/>
-          </a:fillRef>
-          <a:effectRef idx="1">
-            <a:schemeClr val="accent1"/>
-          </a:effectRef>
-          <a:fontRef idx="minor">
-            <a:schemeClr val="tx1"/>
-          </a:fontRef>
-        </p:style>
-      </p:cxnSp>
-      <p:cxnSp>
-        <p:nvCxnSpPr>
-          <p:cNvPr id="1063" name="Straight Arrow Connector 1062">
-            <a:extLst>
-              <a:ext uri="{FF2B5EF4-FFF2-40B4-BE49-F238E27FC236}">
-                <a16:creationId xmlns:a16="http://schemas.microsoft.com/office/drawing/2014/main" id="{F01DE073-C6C2-A481-00B3-74B4A9B878C6}"/>
-              </a:ext>
-            </a:extLst>
-          </p:cNvPr>
-          <p:cNvCxnSpPr>
-            <a:cxnSpLocks/>
-          </p:cNvCxnSpPr>
-          <p:nvPr/>
-        </p:nvCxnSpPr>
-        <p:spPr>
-          <a:xfrm flipH="1">
-            <a:off x="6838904" y="4230700"/>
-            <a:ext cx="663443" cy="485"/>
-          </a:xfrm>
-          <a:prstGeom prst="straightConnector1">
-            <a:avLst/>
-          </a:prstGeom>
-          <a:ln w="38100">
-            <a:headEnd type="triangle"/>
-            <a:tailEnd type="triangle"/>
-          </a:ln>
-        </p:spPr>
-        <p:style>
-          <a:lnRef idx="2">
-            <a:schemeClr val="accent1"/>
-          </a:lnRef>
-          <a:fillRef idx="0">
-            <a:schemeClr val="accent1"/>
-          </a:fillRef>
-          <a:effectRef idx="1">
-            <a:schemeClr val="accent1"/>
-          </a:effectRef>
-          <a:fontRef idx="minor">
-            <a:schemeClr val="tx1"/>
-          </a:fontRef>
-        </p:style>
-      </p:cxnSp>
-      <p:cxnSp>
-        <p:nvCxnSpPr>
-          <p:cNvPr id="1064" name="Straight Arrow Connector 1063">
-            <a:extLst>
-              <a:ext uri="{FF2B5EF4-FFF2-40B4-BE49-F238E27FC236}">
-                <a16:creationId xmlns:a16="http://schemas.microsoft.com/office/drawing/2014/main" id="{138FBE94-5949-9410-F8DE-F23CC3865006}"/>
-              </a:ext>
-            </a:extLst>
-          </p:cNvPr>
-          <p:cNvCxnSpPr>
-            <a:cxnSpLocks/>
-          </p:cNvCxnSpPr>
-          <p:nvPr/>
-        </p:nvCxnSpPr>
-        <p:spPr>
-          <a:xfrm flipH="1">
-            <a:off x="6843142" y="4383100"/>
-            <a:ext cx="663443" cy="485"/>
-          </a:xfrm>
-          <a:prstGeom prst="straightConnector1">
-            <a:avLst/>
-          </a:prstGeom>
-          <a:ln w="38100">
-            <a:headEnd type="triangle"/>
-            <a:tailEnd type="triangle"/>
-          </a:ln>
-        </p:spPr>
-        <p:style>
-          <a:lnRef idx="2">
-            <a:schemeClr val="accent1"/>
-          </a:lnRef>
-          <a:fillRef idx="0">
-            <a:schemeClr val="accent1"/>
-          </a:fillRef>
-          <a:effectRef idx="1">
-            <a:schemeClr val="accent1"/>
-          </a:effectRef>
-          <a:fontRef idx="minor">
-            <a:schemeClr val="tx1"/>
-          </a:fontRef>
-        </p:style>
-      </p:cxnSp>
-      <p:cxnSp>
-        <p:nvCxnSpPr>
-          <p:cNvPr id="1065" name="Straight Arrow Connector 1064">
-            <a:extLst>
-              <a:ext uri="{FF2B5EF4-FFF2-40B4-BE49-F238E27FC236}">
-                <a16:creationId xmlns:a16="http://schemas.microsoft.com/office/drawing/2014/main" id="{CF12B479-3A66-1EE0-DB5D-7F49730250C3}"/>
-              </a:ext>
-            </a:extLst>
-          </p:cNvPr>
-          <p:cNvCxnSpPr>
-            <a:cxnSpLocks/>
-          </p:cNvCxnSpPr>
-          <p:nvPr/>
-        </p:nvCxnSpPr>
-        <p:spPr>
-          <a:xfrm flipH="1">
-            <a:off x="6841115" y="4549747"/>
-            <a:ext cx="663443" cy="485"/>
-          </a:xfrm>
-          <a:prstGeom prst="straightConnector1">
-            <a:avLst/>
-          </a:prstGeom>
-          <a:ln w="38100">
-            <a:headEnd type="triangle"/>
-            <a:tailEnd type="triangle"/>
-          </a:ln>
-        </p:spPr>
-        <p:style>
-          <a:lnRef idx="2">
-            <a:schemeClr val="accent1"/>
-          </a:lnRef>
-          <a:fillRef idx="0">
-            <a:schemeClr val="accent1"/>
-          </a:fillRef>
-          <a:effectRef idx="1">
-            <a:schemeClr val="accent1"/>
-          </a:effectRef>
-          <a:fontRef idx="minor">
-            <a:schemeClr val="tx1"/>
-          </a:fontRef>
-        </p:style>
-      </p:cxnSp>
-      <p:sp>
-        <p:nvSpPr>
-          <p:cNvPr id="1071" name="TextBox 1070">
-            <a:extLst>
-              <a:ext uri="{FF2B5EF4-FFF2-40B4-BE49-F238E27FC236}">
-                <a16:creationId xmlns:a16="http://schemas.microsoft.com/office/drawing/2014/main" id="{6A083AD4-035C-56A8-BE8E-0DDCBA9E2C7A}"/>
-              </a:ext>
-            </a:extLst>
-          </p:cNvPr>
-          <p:cNvSpPr txBox="1"/>
-          <p:nvPr/>
-        </p:nvSpPr>
-        <p:spPr>
-          <a:xfrm>
-            <a:off x="2806780" y="5056179"/>
-            <a:ext cx="1682216" cy="369332"/>
-          </a:xfrm>
-          <a:prstGeom prst="rect">
-            <a:avLst/>
-          </a:prstGeom>
-          <a:noFill/>
-          <a:ln>
-            <a:solidFill>
-              <a:schemeClr val="tx1"/>
-            </a:solidFill>
-          </a:ln>
-        </p:spPr>
-        <p:txBody>
-          <a:bodyPr wrap="square" rtlCol="0">
-            <a:spAutoFit/>
-          </a:bodyPr>
-          <a:lstStyle/>
-          <a:p>
-            <a:pPr algn="ctr"/>
-            <a:r>
-              <a:rPr lang="en-US" dirty="0" err="1"/>
-              <a:t>model_catch.R</a:t>
-            </a:r>
-            <a:endParaRPr lang="en-US" dirty="0"/>
-          </a:p>
-        </p:txBody>
-      </p:sp>
-      <p:sp>
-        <p:nvSpPr>
-          <p:cNvPr id="1076" name="TextBox 1075">
-            <a:extLst>
-              <a:ext uri="{FF2B5EF4-FFF2-40B4-BE49-F238E27FC236}">
-                <a16:creationId xmlns:a16="http://schemas.microsoft.com/office/drawing/2014/main" id="{DBDDDEFA-88A7-BD8F-F61C-85F7784D0B8C}"/>
-              </a:ext>
-            </a:extLst>
-          </p:cNvPr>
-          <p:cNvSpPr txBox="1"/>
-          <p:nvPr/>
-        </p:nvSpPr>
-        <p:spPr>
-          <a:xfrm>
-            <a:off x="7551871" y="5147385"/>
-            <a:ext cx="1682216" cy="307777"/>
-          </a:xfrm>
-          <a:prstGeom prst="rect">
-            <a:avLst/>
-          </a:prstGeom>
-          <a:noFill/>
-          <a:ln>
-            <a:solidFill>
-              <a:schemeClr val="tx1"/>
-            </a:solidFill>
-          </a:ln>
-        </p:spPr>
-        <p:txBody>
-          <a:bodyPr wrap="square" rtlCol="0">
-            <a:spAutoFit/>
-          </a:bodyPr>
-          <a:lstStyle/>
-          <a:p>
-            <a:pPr algn="ctr"/>
-            <a:r>
-              <a:rPr lang="en-US" sz="1400" dirty="0" err="1"/>
-              <a:t>model_efficiency.R</a:t>
-            </a:r>
-            <a:endParaRPr lang="en-US" sz="1400" dirty="0"/>
-          </a:p>
-        </p:txBody>
-      </p:sp>
-      <p:cxnSp>
-        <p:nvCxnSpPr>
-          <p:cNvPr id="1078" name="Straight Arrow Connector 1077">
-            <a:extLst>
-              <a:ext uri="{FF2B5EF4-FFF2-40B4-BE49-F238E27FC236}">
-                <a16:creationId xmlns:a16="http://schemas.microsoft.com/office/drawing/2014/main" id="{EF2776C5-F357-F61C-E9CD-0B58B0F8B695}"/>
-              </a:ext>
-            </a:extLst>
-          </p:cNvPr>
-          <p:cNvCxnSpPr>
-            <a:cxnSpLocks/>
-          </p:cNvCxnSpPr>
-          <p:nvPr/>
-        </p:nvCxnSpPr>
-        <p:spPr>
-          <a:xfrm flipV="1">
-            <a:off x="3971724" y="4640030"/>
-            <a:ext cx="0" cy="367288"/>
-          </a:xfrm>
-          <a:prstGeom prst="straightConnector1">
-            <a:avLst/>
-          </a:prstGeom>
-          <a:ln w="38100">
-            <a:headEnd type="triangle"/>
-            <a:tailEnd type="triangle"/>
-          </a:ln>
-        </p:spPr>
-        <p:style>
-          <a:lnRef idx="2">
-            <a:schemeClr val="accent1"/>
-          </a:lnRef>
-          <a:fillRef idx="0">
-            <a:schemeClr val="accent1"/>
-          </a:fillRef>
-          <a:effectRef idx="1">
-            <a:schemeClr val="accent1"/>
-          </a:effectRef>
-          <a:fontRef idx="minor">
-            <a:schemeClr val="tx1"/>
-          </a:fontRef>
-        </p:style>
-      </p:cxnSp>
-      <p:cxnSp>
-        <p:nvCxnSpPr>
-          <p:cNvPr id="1080" name="Straight Arrow Connector 1079">
-            <a:extLst>
-              <a:ext uri="{FF2B5EF4-FFF2-40B4-BE49-F238E27FC236}">
-                <a16:creationId xmlns:a16="http://schemas.microsoft.com/office/drawing/2014/main" id="{0B7E15EF-23DD-BF40-3676-21292B62089B}"/>
-              </a:ext>
-            </a:extLst>
-          </p:cNvPr>
-          <p:cNvCxnSpPr>
-            <a:cxnSpLocks/>
-          </p:cNvCxnSpPr>
-          <p:nvPr/>
-        </p:nvCxnSpPr>
-        <p:spPr>
-          <a:xfrm flipV="1">
-            <a:off x="7694545" y="4596999"/>
-            <a:ext cx="0" cy="488831"/>
-          </a:xfrm>
-          <a:prstGeom prst="straightConnector1">
-            <a:avLst/>
-          </a:prstGeom>
-          <a:ln w="38100">
-            <a:headEnd type="triangle"/>
-            <a:tailEnd type="triangle"/>
-          </a:ln>
-        </p:spPr>
-        <p:style>
-          <a:lnRef idx="2">
-            <a:schemeClr val="accent1"/>
-          </a:lnRef>
-          <a:fillRef idx="0">
-            <a:schemeClr val="accent1"/>
-          </a:fillRef>
-          <a:effectRef idx="1">
-            <a:schemeClr val="accent1"/>
-          </a:effectRef>
-          <a:fontRef idx="minor">
-            <a:schemeClr val="tx1"/>
-          </a:fontRef>
-        </p:style>
-      </p:cxnSp>
-      <p:sp>
-        <p:nvSpPr>
-          <p:cNvPr id="1084" name="TextBox 1083">
-            <a:extLst>
-              <a:ext uri="{FF2B5EF4-FFF2-40B4-BE49-F238E27FC236}">
-                <a16:creationId xmlns:a16="http://schemas.microsoft.com/office/drawing/2014/main" id="{D01BED6D-0FC1-7191-B4BE-C9524901E489}"/>
-              </a:ext>
-            </a:extLst>
-          </p:cNvPr>
-          <p:cNvSpPr txBox="1"/>
-          <p:nvPr/>
-        </p:nvSpPr>
-        <p:spPr>
-          <a:xfrm>
-            <a:off x="8603789" y="4747276"/>
-            <a:ext cx="1682216" cy="246221"/>
-          </a:xfrm>
-          <a:prstGeom prst="rect">
-            <a:avLst/>
-          </a:prstGeom>
-          <a:noFill/>
-          <a:ln>
-            <a:solidFill>
-              <a:schemeClr val="tx1"/>
-            </a:solidFill>
-          </a:ln>
-        </p:spPr>
-        <p:txBody>
-          <a:bodyPr wrap="square" rtlCol="0">
-            <a:spAutoFit/>
-          </a:bodyPr>
-          <a:lstStyle/>
-          <a:p>
-            <a:pPr algn="ctr"/>
-            <a:r>
-              <a:rPr lang="en-US" sz="1000" dirty="0" err="1"/>
-              <a:t>find_visits_near_release.R</a:t>
-            </a:r>
-            <a:endParaRPr lang="en-US" sz="1000" dirty="0"/>
-          </a:p>
-        </p:txBody>
-      </p:sp>
-      <p:cxnSp>
-        <p:nvCxnSpPr>
-          <p:cNvPr id="1086" name="Straight Arrow Connector 1085">
-            <a:extLst>
-              <a:ext uri="{FF2B5EF4-FFF2-40B4-BE49-F238E27FC236}">
-                <a16:creationId xmlns:a16="http://schemas.microsoft.com/office/drawing/2014/main" id="{B8F73A6B-B9F9-144B-488C-5C18DD4DFA9D}"/>
-              </a:ext>
-            </a:extLst>
-          </p:cNvPr>
-          <p:cNvCxnSpPr>
-            <a:cxnSpLocks/>
-            <a:stCxn id="1084" idx="0"/>
-            <a:endCxn id="24" idx="3"/>
-          </p:cNvCxnSpPr>
-          <p:nvPr/>
-        </p:nvCxnSpPr>
-        <p:spPr>
-          <a:xfrm flipH="1" flipV="1">
-            <a:off x="9144513" y="4383100"/>
-            <a:ext cx="300384" cy="364176"/>
-          </a:xfrm>
-          <a:prstGeom prst="straightConnector1">
-            <a:avLst/>
-          </a:prstGeom>
-          <a:ln w="38100">
-            <a:headEnd type="triangle"/>
-            <a:tailEnd type="triangle"/>
-          </a:ln>
-        </p:spPr>
-        <p:style>
-          <a:lnRef idx="2">
-            <a:schemeClr val="accent1"/>
-          </a:lnRef>
-          <a:fillRef idx="0">
-            <a:schemeClr val="accent1"/>
-          </a:fillRef>
-          <a:effectRef idx="1">
-            <a:schemeClr val="accent1"/>
-          </a:effectRef>
-          <a:fontRef idx="minor">
-            <a:schemeClr val="tx1"/>
-          </a:fontRef>
-        </p:style>
-      </p:cxnSp>
-      <p:sp>
-        <p:nvSpPr>
-          <p:cNvPr id="1097" name="TextBox 1096">
-            <a:extLst>
-              <a:ext uri="{FF2B5EF4-FFF2-40B4-BE49-F238E27FC236}">
-                <a16:creationId xmlns:a16="http://schemas.microsoft.com/office/drawing/2014/main" id="{12CB0752-F8A1-C486-F0E8-AC51EAC4E91C}"/>
-              </a:ext>
-            </a:extLst>
-          </p:cNvPr>
-          <p:cNvSpPr txBox="1"/>
-          <p:nvPr/>
-        </p:nvSpPr>
-        <p:spPr>
-          <a:xfrm>
-            <a:off x="7694545" y="3078892"/>
-            <a:ext cx="1892851" cy="338554"/>
-          </a:xfrm>
-          <a:prstGeom prst="rect">
-            <a:avLst/>
-          </a:prstGeom>
-          <a:noFill/>
-          <a:ln>
-            <a:solidFill>
-              <a:schemeClr val="tx1"/>
-            </a:solidFill>
-          </a:ln>
-        </p:spPr>
-        <p:txBody>
-          <a:bodyPr wrap="square" rtlCol="0">
-            <a:spAutoFit/>
-          </a:bodyPr>
-          <a:lstStyle/>
-          <a:p>
-            <a:pPr algn="ctr"/>
-            <a:r>
-              <a:rPr lang="en-US" sz="1600" dirty="0" err="1"/>
-              <a:t>passage_boot.R</a:t>
-            </a:r>
-            <a:endParaRPr lang="en-US" sz="1600" dirty="0"/>
-          </a:p>
-        </p:txBody>
-      </p:sp>
-      <p:cxnSp>
-        <p:nvCxnSpPr>
-          <p:cNvPr id="1098" name="Straight Arrow Connector 1097">
-            <a:extLst>
-              <a:ext uri="{FF2B5EF4-FFF2-40B4-BE49-F238E27FC236}">
-                <a16:creationId xmlns:a16="http://schemas.microsoft.com/office/drawing/2014/main" id="{4B79FFC2-BA4C-C2BE-CC05-A3897B82E0DC}"/>
-              </a:ext>
-            </a:extLst>
-          </p:cNvPr>
-          <p:cNvCxnSpPr>
-            <a:cxnSpLocks/>
-          </p:cNvCxnSpPr>
-          <p:nvPr/>
-        </p:nvCxnSpPr>
-        <p:spPr>
-          <a:xfrm flipH="1" flipV="1">
-            <a:off x="6524839" y="2883665"/>
-            <a:ext cx="1128153" cy="353943"/>
-          </a:xfrm>
-          <a:prstGeom prst="straightConnector1">
-            <a:avLst/>
-          </a:prstGeom>
-          <a:ln w="38100">
-            <a:headEnd type="triangle"/>
-            <a:tailEnd type="triangle"/>
-          </a:ln>
-        </p:spPr>
-        <p:style>
-          <a:lnRef idx="2">
-            <a:schemeClr val="accent1"/>
-          </a:lnRef>
-          <a:fillRef idx="0">
-            <a:schemeClr val="accent1"/>
-          </a:fillRef>
-          <a:effectRef idx="1">
-            <a:schemeClr val="accent1"/>
-          </a:effectRef>
-          <a:fontRef idx="minor">
-            <a:schemeClr val="tx1"/>
-          </a:fontRef>
-        </p:style>
-      </p:cxnSp>
-      <p:sp>
-        <p:nvSpPr>
-          <p:cNvPr id="1103" name="TextBox 1102">
-            <a:extLst>
-              <a:ext uri="{FF2B5EF4-FFF2-40B4-BE49-F238E27FC236}">
-                <a16:creationId xmlns:a16="http://schemas.microsoft.com/office/drawing/2014/main" id="{53AC842C-A473-DCE0-3329-23F7D98717D1}"/>
-              </a:ext>
-            </a:extLst>
-          </p:cNvPr>
-          <p:cNvSpPr txBox="1"/>
-          <p:nvPr/>
-        </p:nvSpPr>
-        <p:spPr>
-          <a:xfrm>
-            <a:off x="7897369" y="1545380"/>
-            <a:ext cx="1892851" cy="1077218"/>
-          </a:xfrm>
-          <a:prstGeom prst="rect">
-            <a:avLst/>
-          </a:prstGeom>
-          <a:solidFill>
-            <a:schemeClr val="accent2">
-              <a:lumMod val="40000"/>
-              <a:lumOff val="60000"/>
-            </a:schemeClr>
-          </a:solidFill>
-          <a:ln>
-            <a:solidFill>
-              <a:schemeClr val="tx1"/>
-            </a:solidFill>
-          </a:ln>
-        </p:spPr>
-        <p:txBody>
-          <a:bodyPr wrap="square" rtlCol="0">
-            <a:spAutoFit/>
-          </a:bodyPr>
-          <a:lstStyle/>
-          <a:p>
-            <a:pPr algn="ctr"/>
-            <a:r>
-              <a:rPr lang="en-US" sz="1600" dirty="0" err="1"/>
-              <a:t>passage_estimates</a:t>
-            </a:r>
-            <a:endParaRPr lang="en-US" sz="1600" dirty="0"/>
-          </a:p>
-          <a:p>
-            <a:pPr algn="ctr"/>
-            <a:r>
-              <a:rPr lang="en-US" sz="1600" dirty="0" err="1"/>
-              <a:t>efficiency_results</a:t>
-            </a:r>
-            <a:endParaRPr lang="en-US" sz="1600" dirty="0"/>
-          </a:p>
-          <a:p>
-            <a:pPr algn="ctr"/>
-            <a:r>
-              <a:rPr lang="en-US" sz="1600" dirty="0" err="1"/>
-              <a:t>catch_results</a:t>
-            </a:r>
-            <a:endParaRPr lang="en-US" sz="1600" dirty="0"/>
-          </a:p>
-          <a:p>
-            <a:pPr algn="ctr"/>
-            <a:r>
-              <a:rPr lang="en-US" sz="1600" dirty="0"/>
-              <a:t>summary plots</a:t>
-            </a:r>
-          </a:p>
-        </p:txBody>
-      </p:sp>
-      <p:cxnSp>
-        <p:nvCxnSpPr>
-          <p:cNvPr id="1106" name="Straight Arrow Connector 1105">
-            <a:extLst>
-              <a:ext uri="{FF2B5EF4-FFF2-40B4-BE49-F238E27FC236}">
-                <a16:creationId xmlns:a16="http://schemas.microsoft.com/office/drawing/2014/main" id="{AFF0A3B8-EBD8-FEF9-5188-91DC1BF91691}"/>
-              </a:ext>
-            </a:extLst>
-          </p:cNvPr>
-          <p:cNvCxnSpPr>
-            <a:cxnSpLocks/>
-          </p:cNvCxnSpPr>
-          <p:nvPr/>
-        </p:nvCxnSpPr>
-        <p:spPr>
-          <a:xfrm>
-            <a:off x="6555877" y="2330560"/>
-            <a:ext cx="1201538" cy="0"/>
-          </a:xfrm>
-          <a:prstGeom prst="straightConnector1">
-            <a:avLst/>
-          </a:prstGeom>
-          <a:ln w="76200">
-            <a:tailEnd type="triangle"/>
-          </a:ln>
-        </p:spPr>
-        <p:style>
-          <a:lnRef idx="2">
-            <a:schemeClr val="accent1"/>
-          </a:lnRef>
-          <a:fillRef idx="0">
-            <a:schemeClr val="accent1"/>
-          </a:fillRef>
-          <a:effectRef idx="1">
-            <a:schemeClr val="accent1"/>
-          </a:effectRef>
-          <a:fontRef idx="minor">
-            <a:schemeClr val="tx1"/>
-          </a:fontRef>
-        </p:style>
-      </p:cxnSp>
-      <p:sp>
-        <p:nvSpPr>
-          <p:cNvPr id="12" name="TextBox 11">
-            <a:extLst>
-              <a:ext uri="{FF2B5EF4-FFF2-40B4-BE49-F238E27FC236}">
-                <a16:creationId xmlns:a16="http://schemas.microsoft.com/office/drawing/2014/main" id="{FCD32D64-CD6D-F599-9041-7FDB1E87E952}"/>
-              </a:ext>
-            </a:extLst>
-          </p:cNvPr>
-          <p:cNvSpPr txBox="1"/>
-          <p:nvPr/>
-        </p:nvSpPr>
-        <p:spPr>
-          <a:xfrm>
-            <a:off x="9985621" y="5640765"/>
-            <a:ext cx="2031879" cy="338554"/>
-          </a:xfrm>
-          <a:prstGeom prst="rect">
-            <a:avLst/>
-          </a:prstGeom>
-          <a:noFill/>
-          <a:ln>
-            <a:solidFill>
-              <a:schemeClr val="tx1"/>
-            </a:solidFill>
-          </a:ln>
-        </p:spPr>
-        <p:txBody>
-          <a:bodyPr wrap="square" rtlCol="0">
-            <a:spAutoFit/>
-          </a:bodyPr>
-          <a:lstStyle/>
-          <a:p>
-            <a:pPr algn="ctr"/>
-            <a:r>
-              <a:rPr lang="en-US" sz="1600" dirty="0" err="1"/>
-              <a:t>summarize_index.R</a:t>
-            </a:r>
-            <a:endParaRPr lang="en-US" sz="1600" dirty="0"/>
-          </a:p>
-        </p:txBody>
-      </p:sp>
-      <p:sp>
-        <p:nvSpPr>
-          <p:cNvPr id="13" name="TextBox 12">
-            <a:extLst>
-              <a:ext uri="{FF2B5EF4-FFF2-40B4-BE49-F238E27FC236}">
-                <a16:creationId xmlns:a16="http://schemas.microsoft.com/office/drawing/2014/main" id="{1DD3D82D-363B-050B-0FD5-607FF739383A}"/>
-              </a:ext>
-            </a:extLst>
-          </p:cNvPr>
-          <p:cNvSpPr txBox="1"/>
-          <p:nvPr/>
-        </p:nvSpPr>
-        <p:spPr>
-          <a:xfrm>
-            <a:off x="9790219" y="3962191"/>
-            <a:ext cx="2227281" cy="338554"/>
-          </a:xfrm>
-          <a:prstGeom prst="rect">
-            <a:avLst/>
-          </a:prstGeom>
-          <a:noFill/>
-          <a:ln>
-            <a:solidFill>
-              <a:schemeClr val="tx1"/>
-            </a:solidFill>
-          </a:ln>
-        </p:spPr>
-        <p:txBody>
-          <a:bodyPr wrap="square" rtlCol="0">
-            <a:spAutoFit/>
-          </a:bodyPr>
-          <a:lstStyle/>
-          <a:p>
-            <a:pPr algn="ctr"/>
-            <a:r>
-              <a:rPr lang="en-US" sz="1600" dirty="0" err="1"/>
-              <a:t>summarize_passage.R</a:t>
-            </a:r>
-            <a:endParaRPr lang="en-US" sz="1600" dirty="0"/>
-          </a:p>
-        </p:txBody>
-      </p:sp>
-      <p:cxnSp>
-        <p:nvCxnSpPr>
-          <p:cNvPr id="16" name="Straight Arrow Connector 15">
-            <a:extLst>
-              <a:ext uri="{FF2B5EF4-FFF2-40B4-BE49-F238E27FC236}">
-                <a16:creationId xmlns:a16="http://schemas.microsoft.com/office/drawing/2014/main" id="{F53F0ECB-AC8B-D233-D372-0D077E3D595C}"/>
-              </a:ext>
-            </a:extLst>
-          </p:cNvPr>
-          <p:cNvCxnSpPr>
-            <a:cxnSpLocks/>
-          </p:cNvCxnSpPr>
-          <p:nvPr/>
-        </p:nvCxnSpPr>
-        <p:spPr>
-          <a:xfrm>
-            <a:off x="10942938" y="4412333"/>
-            <a:ext cx="0" cy="1177360"/>
-          </a:xfrm>
-          <a:prstGeom prst="straightConnector1">
-            <a:avLst/>
-          </a:prstGeom>
-          <a:ln w="38100">
-            <a:headEnd type="triangle"/>
-            <a:tailEnd type="triangle"/>
-          </a:ln>
-        </p:spPr>
-        <p:style>
-          <a:lnRef idx="2">
-            <a:schemeClr val="accent1"/>
-          </a:lnRef>
-          <a:fillRef idx="0">
-            <a:schemeClr val="accent1"/>
-          </a:fillRef>
-          <a:effectRef idx="1">
-            <a:schemeClr val="accent1"/>
-          </a:effectRef>
-          <a:fontRef idx="minor">
-            <a:schemeClr val="tx1"/>
-          </a:fontRef>
-        </p:style>
-      </p:cxnSp>
-      <p:cxnSp>
-        <p:nvCxnSpPr>
-          <p:cNvPr id="18" name="Straight Arrow Connector 17">
-            <a:extLst>
-              <a:ext uri="{FF2B5EF4-FFF2-40B4-BE49-F238E27FC236}">
-                <a16:creationId xmlns:a16="http://schemas.microsoft.com/office/drawing/2014/main" id="{E436D742-784D-2274-AA0E-C97173FE74AA}"/>
-              </a:ext>
-            </a:extLst>
-          </p:cNvPr>
-          <p:cNvCxnSpPr>
-            <a:cxnSpLocks/>
-            <a:endCxn id="1097" idx="3"/>
-          </p:cNvCxnSpPr>
-          <p:nvPr/>
-        </p:nvCxnSpPr>
-        <p:spPr>
-          <a:xfrm flipH="1" flipV="1">
-            <a:off x="9587396" y="3248169"/>
-            <a:ext cx="1116890" cy="664915"/>
-          </a:xfrm>
-          <a:prstGeom prst="straightConnector1">
-            <a:avLst/>
-          </a:prstGeom>
-          <a:ln w="38100">
-            <a:headEnd type="triangle"/>
-            <a:tailEnd type="triangle"/>
-          </a:ln>
-        </p:spPr>
-        <p:style>
-          <a:lnRef idx="2">
-            <a:schemeClr val="accent1"/>
-          </a:lnRef>
-          <a:fillRef idx="0">
-            <a:schemeClr val="accent1"/>
-          </a:fillRef>
-          <a:effectRef idx="1">
-            <a:schemeClr val="accent1"/>
-          </a:effectRef>
-          <a:fontRef idx="minor">
-            <a:schemeClr val="tx1"/>
-          </a:fontRef>
-        </p:style>
-      </p:cxnSp>
+      </p:pic>
     </p:spTree>
     <p:extLst>
       <p:ext uri="{BB962C8B-B14F-4D97-AF65-F5344CB8AC3E}">
-        <p14:creationId xmlns:p14="http://schemas.microsoft.com/office/powerpoint/2010/main" val="291410532"/>
+        <p14:creationId xmlns:p14="http://schemas.microsoft.com/office/powerpoint/2010/main" val="3349216178"/>
       </p:ext>
     </p:extLst>
   </p:cSld>
@@ -7188,10 +7721,10 @@
             <p:nvPr/>
           </p:nvPicPr>
           <p:blipFill>
-            <a:blip>
+            <a:blip r:embed="rId2">
               <a:extLst>
                 <a:ext uri="{96DAC541-7B7A-43D3-8B79-37D633B846F1}">
-                  <asvg:svgBlip xmlns:asvg="http://schemas.microsoft.com/office/drawing/2016/SVG/main" r:embed="rId2"/>
+                  <asvg:svgBlip xmlns:asvg="http://schemas.microsoft.com/office/drawing/2016/SVG/main" r:embed="rId3"/>
                 </a:ext>
               </a:extLst>
             </a:blip>
@@ -7224,10 +7757,10 @@
             <p:nvPr/>
           </p:nvPicPr>
           <p:blipFill>
-            <a:blip>
+            <a:blip r:embed="rId4">
               <a:extLst>
                 <a:ext uri="{96DAC541-7B7A-43D3-8B79-37D633B846F1}">
-                  <asvg:svgBlip xmlns:asvg="http://schemas.microsoft.com/office/drawing/2016/SVG/main" r:embed="rId3"/>
+                  <asvg:svgBlip xmlns:asvg="http://schemas.microsoft.com/office/drawing/2016/SVG/main" r:embed="rId5"/>
                 </a:ext>
               </a:extLst>
             </a:blip>
@@ -7465,10 +7998,10 @@
             <p:nvPr/>
           </p:nvPicPr>
           <p:blipFill>
-            <a:blip>
+            <a:blip r:embed="rId6">
               <a:extLst>
                 <a:ext uri="{96DAC541-7B7A-43D3-8B79-37D633B846F1}">
-                  <asvg:svgBlip xmlns:asvg="http://schemas.microsoft.com/office/drawing/2016/SVG/main" r:embed="rId4"/>
+                  <asvg:svgBlip xmlns:asvg="http://schemas.microsoft.com/office/drawing/2016/SVG/main" r:embed="rId7"/>
                 </a:ext>
               </a:extLst>
             </a:blip>
@@ -7677,10 +8210,10 @@
             <p:nvPr/>
           </p:nvPicPr>
           <p:blipFill>
-            <a:blip>
+            <a:blip r:embed="rId8">
               <a:extLst>
                 <a:ext uri="{96DAC541-7B7A-43D3-8B79-37D633B846F1}">
-                  <asvg:svgBlip xmlns:asvg="http://schemas.microsoft.com/office/drawing/2016/SVG/main" r:embed="rId5"/>
+                  <asvg:svgBlip xmlns:asvg="http://schemas.microsoft.com/office/drawing/2016/SVG/main" r:embed="rId9"/>
                 </a:ext>
               </a:extLst>
             </a:blip>
@@ -7843,10 +8376,10 @@
             <p:nvPr/>
           </p:nvPicPr>
           <p:blipFill>
-            <a:blip>
+            <a:blip r:embed="rId10">
               <a:extLst>
                 <a:ext uri="{96DAC541-7B7A-43D3-8B79-37D633B846F1}">
-                  <asvg:svgBlip xmlns:asvg="http://schemas.microsoft.com/office/drawing/2016/SVG/main" r:embed="rId6"/>
+                  <asvg:svgBlip xmlns:asvg="http://schemas.microsoft.com/office/drawing/2016/SVG/main" r:embed="rId11"/>
                 </a:ext>
               </a:extLst>
             </a:blip>
@@ -8092,10 +8625,10 @@
           <p:nvPr/>
         </p:nvPicPr>
         <p:blipFill>
-          <a:blip>
+          <a:blip r:embed="rId12">
             <a:extLst>
               <a:ext uri="{96DAC541-7B7A-43D3-8B79-37D633B846F1}">
-                <asvg:svgBlip xmlns:asvg="http://schemas.microsoft.com/office/drawing/2016/SVG/main" r:embed="rId7"/>
+                <asvg:svgBlip xmlns:asvg="http://schemas.microsoft.com/office/drawing/2016/SVG/main" r:embed="rId13"/>
               </a:ext>
             </a:extLst>
           </a:blip>
@@ -8128,10 +8661,10 @@
           <p:nvPr/>
         </p:nvPicPr>
         <p:blipFill>
-          <a:blip>
+          <a:blip r:embed="rId14">
             <a:extLst>
               <a:ext uri="{96DAC541-7B7A-43D3-8B79-37D633B846F1}">
-                <asvg:svgBlip xmlns:asvg="http://schemas.microsoft.com/office/drawing/2016/SVG/main" r:embed="rId8"/>
+                <asvg:svgBlip xmlns:asvg="http://schemas.microsoft.com/office/drawing/2016/SVG/main" r:embed="rId15"/>
               </a:ext>
             </a:extLst>
           </a:blip>
@@ -9331,6 +9864,202 @@
     <p:extLst>
       <p:ext uri="{BB962C8B-B14F-4D97-AF65-F5344CB8AC3E}">
         <p14:creationId xmlns:p14="http://schemas.microsoft.com/office/powerpoint/2010/main" val="4228796254"/>
+      </p:ext>
+    </p:extLst>
+  </p:cSld>
+  <p:clrMapOvr>
+    <a:masterClrMapping/>
+  </p:clrMapOvr>
+</p:sld>
+</file>
+
+<file path=ppt/slides/slide7.xml><?xml version="1.0" encoding="utf-8"?>
+<p:sld xmlns:a="http://schemas.openxmlformats.org/drawingml/2006/main" xmlns:r="http://schemas.openxmlformats.org/officeDocument/2006/relationships" xmlns:p="http://schemas.openxmlformats.org/presentationml/2006/main">
+  <p:cSld>
+    <p:spTree>
+      <p:nvGrpSpPr>
+        <p:cNvPr id="1" name=""/>
+        <p:cNvGrpSpPr/>
+        <p:nvPr/>
+      </p:nvGrpSpPr>
+      <p:grpSpPr>
+        <a:xfrm>
+          <a:off x="0" y="0"/>
+          <a:ext cx="0" cy="0"/>
+          <a:chOff x="0" y="0"/>
+          <a:chExt cx="0" cy="0"/>
+        </a:xfrm>
+      </p:grpSpPr>
+      <p:pic>
+        <p:nvPicPr>
+          <p:cNvPr id="5" name="Picture 4">
+            <a:extLst>
+              <a:ext uri="{FF2B5EF4-FFF2-40B4-BE49-F238E27FC236}">
+                <a16:creationId xmlns:a16="http://schemas.microsoft.com/office/drawing/2014/main" id="{F42DD508-E0FE-2229-3B76-765AA59A967D}"/>
+              </a:ext>
+            </a:extLst>
+          </p:cNvPr>
+          <p:cNvPicPr>
+            <a:picLocks noChangeAspect="1"/>
+          </p:cNvPicPr>
+          <p:nvPr/>
+        </p:nvPicPr>
+        <p:blipFill>
+          <a:blip r:embed="rId2"/>
+          <a:stretch>
+            <a:fillRect/>
+          </a:stretch>
+        </p:blipFill>
+        <p:spPr>
+          <a:xfrm>
+            <a:off x="1093881" y="0"/>
+            <a:ext cx="10004237" cy="6858000"/>
+          </a:xfrm>
+          <a:prstGeom prst="rect">
+            <a:avLst/>
+          </a:prstGeom>
+          <a:ln>
+            <a:solidFill>
+              <a:schemeClr val="tx1"/>
+            </a:solidFill>
+          </a:ln>
+        </p:spPr>
+      </p:pic>
+    </p:spTree>
+    <p:extLst>
+      <p:ext uri="{BB962C8B-B14F-4D97-AF65-F5344CB8AC3E}">
+        <p14:creationId xmlns:p14="http://schemas.microsoft.com/office/powerpoint/2010/main" val="3979468374"/>
+      </p:ext>
+    </p:extLst>
+  </p:cSld>
+  <p:clrMapOvr>
+    <a:masterClrMapping/>
+  </p:clrMapOvr>
+</p:sld>
+</file>
+
+<file path=ppt/slides/slide8.xml><?xml version="1.0" encoding="utf-8"?>
+<p:sld xmlns:a="http://schemas.openxmlformats.org/drawingml/2006/main" xmlns:r="http://schemas.openxmlformats.org/officeDocument/2006/relationships" xmlns:p="http://schemas.openxmlformats.org/presentationml/2006/main">
+  <p:cSld>
+    <p:spTree>
+      <p:nvGrpSpPr>
+        <p:cNvPr id="1" name=""/>
+        <p:cNvGrpSpPr/>
+        <p:nvPr/>
+      </p:nvGrpSpPr>
+      <p:grpSpPr>
+        <a:xfrm>
+          <a:off x="0" y="0"/>
+          <a:ext cx="0" cy="0"/>
+          <a:chOff x="0" y="0"/>
+          <a:chExt cx="0" cy="0"/>
+        </a:xfrm>
+      </p:grpSpPr>
+      <p:pic>
+        <p:nvPicPr>
+          <p:cNvPr id="7" name="Picture 6">
+            <a:extLst>
+              <a:ext uri="{FF2B5EF4-FFF2-40B4-BE49-F238E27FC236}">
+                <a16:creationId xmlns:a16="http://schemas.microsoft.com/office/drawing/2014/main" id="{878B66BB-CC08-4187-0732-155D1414B52A}"/>
+              </a:ext>
+            </a:extLst>
+          </p:cNvPr>
+          <p:cNvPicPr>
+            <a:picLocks noChangeAspect="1"/>
+          </p:cNvPicPr>
+          <p:nvPr/>
+        </p:nvPicPr>
+        <p:blipFill>
+          <a:blip r:embed="rId2"/>
+          <a:stretch>
+            <a:fillRect/>
+          </a:stretch>
+        </p:blipFill>
+        <p:spPr>
+          <a:xfrm>
+            <a:off x="75360" y="652075"/>
+            <a:ext cx="12041280" cy="5553850"/>
+          </a:xfrm>
+          <a:prstGeom prst="rect">
+            <a:avLst/>
+          </a:prstGeom>
+          <a:ln>
+            <a:solidFill>
+              <a:schemeClr val="tx1"/>
+            </a:solidFill>
+          </a:ln>
+        </p:spPr>
+      </p:pic>
+    </p:spTree>
+    <p:extLst>
+      <p:ext uri="{BB962C8B-B14F-4D97-AF65-F5344CB8AC3E}">
+        <p14:creationId xmlns:p14="http://schemas.microsoft.com/office/powerpoint/2010/main" val="1781711548"/>
+      </p:ext>
+    </p:extLst>
+  </p:cSld>
+  <p:clrMapOvr>
+    <a:masterClrMapping/>
+  </p:clrMapOvr>
+</p:sld>
+</file>
+
+<file path=ppt/slides/slide9.xml><?xml version="1.0" encoding="utf-8"?>
+<p:sld xmlns:a="http://schemas.openxmlformats.org/drawingml/2006/main" xmlns:r="http://schemas.openxmlformats.org/officeDocument/2006/relationships" xmlns:p="http://schemas.openxmlformats.org/presentationml/2006/main">
+  <p:cSld>
+    <p:spTree>
+      <p:nvGrpSpPr>
+        <p:cNvPr id="1" name=""/>
+        <p:cNvGrpSpPr/>
+        <p:nvPr/>
+      </p:nvGrpSpPr>
+      <p:grpSpPr>
+        <a:xfrm>
+          <a:off x="0" y="0"/>
+          <a:ext cx="0" cy="0"/>
+          <a:chOff x="0" y="0"/>
+          <a:chExt cx="0" cy="0"/>
+        </a:xfrm>
+      </p:grpSpPr>
+      <p:pic>
+        <p:nvPicPr>
+          <p:cNvPr id="5" name="Picture 4">
+            <a:extLst>
+              <a:ext uri="{FF2B5EF4-FFF2-40B4-BE49-F238E27FC236}">
+                <a16:creationId xmlns:a16="http://schemas.microsoft.com/office/drawing/2014/main" id="{65253A6E-26E1-B028-21D7-9A5492F0B755}"/>
+              </a:ext>
+            </a:extLst>
+          </p:cNvPr>
+          <p:cNvPicPr>
+            <a:picLocks noChangeAspect="1"/>
+          </p:cNvPicPr>
+          <p:nvPr/>
+        </p:nvPicPr>
+        <p:blipFill>
+          <a:blip r:embed="rId2"/>
+          <a:srcRect t="3153" b="4087"/>
+          <a:stretch>
+            <a:fillRect/>
+          </a:stretch>
+        </p:blipFill>
+        <p:spPr>
+          <a:xfrm>
+            <a:off x="191271" y="216310"/>
+            <a:ext cx="11809457" cy="6361471"/>
+          </a:xfrm>
+          <a:prstGeom prst="rect">
+            <a:avLst/>
+          </a:prstGeom>
+          <a:ln>
+            <a:solidFill>
+              <a:schemeClr val="tx1"/>
+            </a:solidFill>
+          </a:ln>
+        </p:spPr>
+      </p:pic>
+    </p:spTree>
+    <p:extLst>
+      <p:ext uri="{BB962C8B-B14F-4D97-AF65-F5344CB8AC3E}">
+        <p14:creationId xmlns:p14="http://schemas.microsoft.com/office/powerpoint/2010/main" val="2821681883"/>
       </p:ext>
     </p:extLst>
   </p:cSld>
